--- a/dcrVC.pptx
+++ b/dcrVC.pptx
@@ -7,13 +7,18 @@
   <p:sldIdLst>
     <p:sldId id="265" r:id="rId2"/>
     <p:sldId id="260" r:id="rId3"/>
-    <p:sldId id="264" r:id="rId4"/>
-    <p:sldId id="263" r:id="rId5"/>
-    <p:sldId id="259" r:id="rId6"/>
-    <p:sldId id="257" r:id="rId7"/>
-    <p:sldId id="258" r:id="rId8"/>
-    <p:sldId id="261" r:id="rId9"/>
-    <p:sldId id="262" r:id="rId10"/>
+    <p:sldId id="267" r:id="rId4"/>
+    <p:sldId id="266" r:id="rId5"/>
+    <p:sldId id="268" r:id="rId6"/>
+    <p:sldId id="270" r:id="rId7"/>
+    <p:sldId id="264" r:id="rId8"/>
+    <p:sldId id="259" r:id="rId9"/>
+    <p:sldId id="257" r:id="rId10"/>
+    <p:sldId id="258" r:id="rId11"/>
+    <p:sldId id="269" r:id="rId12"/>
+    <p:sldId id="263" r:id="rId13"/>
+    <p:sldId id="261" r:id="rId14"/>
+    <p:sldId id="262" r:id="rId15"/>
   </p:sldIdLst>
   <p:sldSz cx="12192000" cy="6858000"/>
   <p:notesSz cx="6858000" cy="9144000"/>
@@ -1359,7 +1364,7 @@
       <dgm:spPr/>
     </dgm:pt>
     <dgm:pt modelId="{E5A81619-773C-4781-8323-2EE272EC4FB2}" type="pres">
-      <dgm:prSet presAssocID="{D1860CCD-BA28-408C-BBC0-2B4277F5A70B}" presName="center1" presStyleLbl="fgShp" presStyleIdx="0" presStyleCnt="2" custScaleX="114889" custScaleY="119727" custLinFactNeighborX="-16710" custLinFactNeighborY="-18109"/>
+      <dgm:prSet presAssocID="{D1860CCD-BA28-408C-BBC0-2B4277F5A70B}" presName="center1" presStyleLbl="fgShp" presStyleIdx="0" presStyleCnt="2" custScaleX="40966" custScaleY="41863" custLinFactNeighborX="-11999" custLinFactNeighborY="-19175"/>
       <dgm:spPr>
         <a:solidFill>
           <a:srgbClr val="FF5A5F"/>
@@ -1367,7 +1372,7 @@
       </dgm:spPr>
     </dgm:pt>
     <dgm:pt modelId="{35DC1333-E570-45E1-AEFA-90AD7AFD6763}" type="pres">
-      <dgm:prSet presAssocID="{D1860CCD-BA28-408C-BBC0-2B4277F5A70B}" presName="center2" presStyleLbl="fgShp" presStyleIdx="1" presStyleCnt="2" custScaleX="109015" custScaleY="113749" custLinFactNeighborX="-15612" custLinFactNeighborY="-53399"/>
+      <dgm:prSet presAssocID="{D1860CCD-BA28-408C-BBC0-2B4277F5A70B}" presName="center2" presStyleLbl="fgShp" presStyleIdx="1" presStyleCnt="2" custScaleX="40427" custScaleY="43065" custLinFactNeighborX="-11730" custLinFactNeighborY="-46307"/>
       <dgm:spPr>
         <a:solidFill>
           <a:srgbClr val="FF5A5F"/>
@@ -2047,8 +2052,8 @@
       </dsp:nvSpPr>
       <dsp:spPr>
         <a:xfrm>
-          <a:off x="3385069" y="2128205"/>
-          <a:ext cx="976688" cy="885057"/>
+          <a:off x="3739333" y="2408122"/>
+          <a:ext cx="348257" cy="309463"/>
         </a:xfrm>
         <a:prstGeom prst="circularArrow">
           <a:avLst/>
@@ -2089,8 +2094,8 @@
       </dsp:nvSpPr>
       <dsp:spPr>
         <a:xfrm rot="10800000">
-          <a:off x="3419371" y="2173745"/>
-          <a:ext cx="926752" cy="840866"/>
+          <a:off x="3743911" y="2487430"/>
+          <a:ext cx="343675" cy="318349"/>
         </a:xfrm>
         <a:prstGeom prst="circularArrow">
           <a:avLst/>
@@ -4026,7 +4031,7 @@
           <a:p>
             <a:fld id="{56D93E24-BF2E-46B4-A2AC-4AD0A55B5315}" type="datetimeFigureOut">
               <a:rPr lang="en-US" smtClean="0"/>
-              <a:t>5/9/2023</a:t>
+              <a:t>5/19/2023</a:t>
             </a:fld>
             <a:endParaRPr lang="en-US"/>
           </a:p>
@@ -4240,7 +4245,7 @@
           <a:p>
             <a:fld id="{56D93E24-BF2E-46B4-A2AC-4AD0A55B5315}" type="datetimeFigureOut">
               <a:rPr lang="en-US" smtClean="0"/>
-              <a:t>5/9/2023</a:t>
+              <a:t>5/19/2023</a:t>
             </a:fld>
             <a:endParaRPr lang="en-US"/>
           </a:p>
@@ -4458,7 +4463,7 @@
           <a:p>
             <a:fld id="{56D93E24-BF2E-46B4-A2AC-4AD0A55B5315}" type="datetimeFigureOut">
               <a:rPr lang="en-US" smtClean="0"/>
-              <a:t>5/9/2023</a:t>
+              <a:t>5/19/2023</a:t>
             </a:fld>
             <a:endParaRPr lang="en-US"/>
           </a:p>
@@ -4662,7 +4667,7 @@
           <a:p>
             <a:fld id="{56D93E24-BF2E-46B4-A2AC-4AD0A55B5315}" type="datetimeFigureOut">
               <a:rPr lang="en-US" smtClean="0"/>
-              <a:t>5/9/2023</a:t>
+              <a:t>5/19/2023</a:t>
             </a:fld>
             <a:endParaRPr lang="en-US"/>
           </a:p>
@@ -4944,7 +4949,7 @@
           <a:p>
             <a:fld id="{56D93E24-BF2E-46B4-A2AC-4AD0A55B5315}" type="datetimeFigureOut">
               <a:rPr lang="en-US" smtClean="0"/>
-              <a:t>5/9/2023</a:t>
+              <a:t>5/19/2023</a:t>
             </a:fld>
             <a:endParaRPr lang="en-US"/>
           </a:p>
@@ -5215,7 +5220,7 @@
           <a:p>
             <a:fld id="{56D93E24-BF2E-46B4-A2AC-4AD0A55B5315}" type="datetimeFigureOut">
               <a:rPr lang="en-US" smtClean="0"/>
-              <a:t>5/9/2023</a:t>
+              <a:t>5/19/2023</a:t>
             </a:fld>
             <a:endParaRPr lang="en-US"/>
           </a:p>
@@ -5634,7 +5639,7 @@
           <a:p>
             <a:fld id="{56D93E24-BF2E-46B4-A2AC-4AD0A55B5315}" type="datetimeFigureOut">
               <a:rPr lang="en-US" smtClean="0"/>
-              <a:t>5/9/2023</a:t>
+              <a:t>5/19/2023</a:t>
             </a:fld>
             <a:endParaRPr lang="en-US"/>
           </a:p>
@@ -5786,7 +5791,7 @@
           <a:p>
             <a:fld id="{56D93E24-BF2E-46B4-A2AC-4AD0A55B5315}" type="datetimeFigureOut">
               <a:rPr lang="en-US" smtClean="0"/>
-              <a:t>5/9/2023</a:t>
+              <a:t>5/19/2023</a:t>
             </a:fld>
             <a:endParaRPr lang="en-US"/>
           </a:p>
@@ -5915,7 +5920,7 @@
           <a:p>
             <a:fld id="{56D93E24-BF2E-46B4-A2AC-4AD0A55B5315}" type="datetimeFigureOut">
               <a:rPr lang="en-US" smtClean="0"/>
-              <a:t>5/9/2023</a:t>
+              <a:t>5/19/2023</a:t>
             </a:fld>
             <a:endParaRPr lang="en-US"/>
           </a:p>
@@ -6169,7 +6174,7 @@
           <a:p>
             <a:fld id="{56D93E24-BF2E-46B4-A2AC-4AD0A55B5315}" type="datetimeFigureOut">
               <a:rPr lang="en-US" smtClean="0"/>
-              <a:t>5/9/2023</a:t>
+              <a:t>5/19/2023</a:t>
             </a:fld>
             <a:endParaRPr lang="en-US"/>
           </a:p>
@@ -6617,7 +6622,7 @@
           <a:p>
             <a:fld id="{56D93E24-BF2E-46B4-A2AC-4AD0A55B5315}" type="datetimeFigureOut">
               <a:rPr lang="en-US" smtClean="0"/>
-              <a:t>5/9/2023</a:t>
+              <a:t>5/19/2023</a:t>
             </a:fld>
             <a:endParaRPr lang="en-US"/>
           </a:p>
@@ -6947,7 +6952,7 @@
           <a:p>
             <a:fld id="{56D93E24-BF2E-46B4-A2AC-4AD0A55B5315}" type="datetimeFigureOut">
               <a:rPr lang="en-US" smtClean="0"/>
-              <a:t>5/9/2023</a:t>
+              <a:t>5/19/2023</a:t>
             </a:fld>
             <a:endParaRPr lang="en-US"/>
           </a:p>
@@ -7616,11 +7621,14 @@
           </a:p>
           <a:p>
             <a:r>
-              <a:rPr lang="en-US" dirty="0">
+              <a:rPr lang="en-US">
                 <a:latin typeface="Molle"/>
               </a:rPr>
-              <a:t>                                                                                                                                                                             Std. ID- 519599</a:t>
-            </a:r>
+              <a:t>                                                                                                                                                                             </a:t>
+            </a:r>
+            <a:endParaRPr lang="en-US" dirty="0">
+              <a:latin typeface="Molle"/>
+            </a:endParaRPr>
           </a:p>
           <a:p>
             <a:endParaRPr lang="en-US" u="sng" dirty="0"/>
@@ -7717,6 +7725,1890 @@
 </p:sld>
 </file>
 
+<file path=ppt/slides/slide10.xml><?xml version="1.0" encoding="utf-8"?>
+<p:sld xmlns:a="http://schemas.openxmlformats.org/drawingml/2006/main" xmlns:r="http://schemas.openxmlformats.org/officeDocument/2006/relationships" xmlns:p="http://schemas.openxmlformats.org/presentationml/2006/main">
+  <p:cSld>
+    <p:spTree>
+      <p:nvGrpSpPr>
+        <p:cNvPr id="1" name=""/>
+        <p:cNvGrpSpPr/>
+        <p:nvPr/>
+      </p:nvGrpSpPr>
+      <p:grpSpPr>
+        <a:xfrm>
+          <a:off x="0" y="0"/>
+          <a:ext cx="0" cy="0"/>
+          <a:chOff x="0" y="0"/>
+          <a:chExt cx="0" cy="0"/>
+        </a:xfrm>
+      </p:grpSpPr>
+      <p:sp>
+        <p:nvSpPr>
+          <p:cNvPr id="2" name="Title 1">
+            <a:extLst>
+              <a:ext uri="{FF2B5EF4-FFF2-40B4-BE49-F238E27FC236}">
+                <a16:creationId xmlns:a16="http://schemas.microsoft.com/office/drawing/2014/main" id="{ADF2B7CD-37D8-0C01-16F6-7F4816FB1AB5}"/>
+              </a:ext>
+            </a:extLst>
+          </p:cNvPr>
+          <p:cNvSpPr>
+            <a:spLocks noGrp="1"/>
+          </p:cNvSpPr>
+          <p:nvPr>
+            <p:ph type="title"/>
+          </p:nvPr>
+        </p:nvSpPr>
+        <p:spPr>
+          <a:xfrm>
+            <a:off x="838200" y="-79322"/>
+            <a:ext cx="10515600" cy="474630"/>
+          </a:xfrm>
+        </p:spPr>
+        <p:txBody>
+          <a:bodyPr>
+            <a:normAutofit fontScale="90000"/>
+          </a:bodyPr>
+          <a:lstStyle/>
+          <a:p>
+            <a:r>
+              <a:rPr lang="en-US" dirty="0"/>
+              <a:t>                                   </a:t>
+            </a:r>
+            <a:r>
+              <a:rPr lang="en-US" sz="2200" u="sng" dirty="0"/>
+              <a:t>RISK ASSESEMENT MATRIX</a:t>
+            </a:r>
+          </a:p>
+        </p:txBody>
+      </p:sp>
+      <p:graphicFrame>
+        <p:nvGraphicFramePr>
+          <p:cNvPr id="12" name="Table 12">
+            <a:extLst>
+              <a:ext uri="{FF2B5EF4-FFF2-40B4-BE49-F238E27FC236}">
+                <a16:creationId xmlns:a16="http://schemas.microsoft.com/office/drawing/2014/main" id="{D00FA8B9-83E1-8E62-8C21-9A28A7679586}"/>
+              </a:ext>
+            </a:extLst>
+          </p:cNvPr>
+          <p:cNvGraphicFramePr>
+            <a:graphicFrameLocks noGrp="1"/>
+          </p:cNvGraphicFramePr>
+          <p:nvPr>
+            <p:extLst>
+              <p:ext uri="{D42A27DB-BD31-4B8C-83A1-F6EECF244321}">
+                <p14:modId xmlns:p14="http://schemas.microsoft.com/office/powerpoint/2010/main" val="3959327585"/>
+              </p:ext>
+            </p:extLst>
+          </p:nvPr>
+        </p:nvGraphicFramePr>
+        <p:xfrm>
+          <a:off x="8158653" y="4902847"/>
+          <a:ext cx="3788030" cy="1222931"/>
+        </p:xfrm>
+        <a:graphic>
+          <a:graphicData uri="http://schemas.openxmlformats.org/drawingml/2006/table">
+            <a:tbl>
+              <a:tblPr firstRow="1" bandRow="1">
+                <a:tableStyleId>{5C22544A-7EE6-4342-B048-85BDC9FD1C3A}</a:tableStyleId>
+              </a:tblPr>
+              <a:tblGrid>
+                <a:gridCol w="752475">
+                  <a:extLst>
+                    <a:ext uri="{9D8B030D-6E8A-4147-A177-3AD203B41FA5}">
+                      <a16:colId xmlns:a16="http://schemas.microsoft.com/office/drawing/2014/main" val="3503471953"/>
+                    </a:ext>
+                  </a:extLst>
+                </a:gridCol>
+                <a:gridCol w="883679">
+                  <a:extLst>
+                    <a:ext uri="{9D8B030D-6E8A-4147-A177-3AD203B41FA5}">
+                      <a16:colId xmlns:a16="http://schemas.microsoft.com/office/drawing/2014/main" val="3569684599"/>
+                    </a:ext>
+                  </a:extLst>
+                </a:gridCol>
+                <a:gridCol w="1097420">
+                  <a:extLst>
+                    <a:ext uri="{9D8B030D-6E8A-4147-A177-3AD203B41FA5}">
+                      <a16:colId xmlns:a16="http://schemas.microsoft.com/office/drawing/2014/main" val="1149344231"/>
+                    </a:ext>
+                  </a:extLst>
+                </a:gridCol>
+                <a:gridCol w="1054456">
+                  <a:extLst>
+                    <a:ext uri="{9D8B030D-6E8A-4147-A177-3AD203B41FA5}">
+                      <a16:colId xmlns:a16="http://schemas.microsoft.com/office/drawing/2014/main" val="1173549744"/>
+                    </a:ext>
+                  </a:extLst>
+                </a:gridCol>
+              </a:tblGrid>
+              <a:tr h="335050">
+                <a:tc>
+                  <a:txBody>
+                    <a:bodyPr/>
+                    <a:lstStyle/>
+                    <a:p>
+                      <a:endParaRPr lang="en-US" dirty="0"/>
+                    </a:p>
+                  </a:txBody>
+                  <a:tcPr>
+                    <a:solidFill>
+                      <a:schemeClr val="bg1"/>
+                    </a:solidFill>
+                  </a:tcPr>
+                </a:tc>
+                <a:tc>
+                  <a:txBody>
+                    <a:bodyPr/>
+                    <a:lstStyle/>
+                    <a:p>
+                      <a:r>
+                        <a:rPr lang="en-US" sz="1100" b="0" dirty="0"/>
+                        <a:t>LOW</a:t>
+                      </a:r>
+                    </a:p>
+                  </a:txBody>
+                  <a:tcPr>
+                    <a:solidFill>
+                      <a:srgbClr val="00B0F0"/>
+                    </a:solidFill>
+                  </a:tcPr>
+                </a:tc>
+                <a:tc>
+                  <a:txBody>
+                    <a:bodyPr/>
+                    <a:lstStyle/>
+                    <a:p>
+                      <a:r>
+                        <a:rPr lang="en-US" sz="1100" b="0" dirty="0"/>
+                        <a:t>MEDIUM</a:t>
+                      </a:r>
+                    </a:p>
+                  </a:txBody>
+                  <a:tcPr>
+                    <a:solidFill>
+                      <a:srgbClr val="00B0F0"/>
+                    </a:solidFill>
+                  </a:tcPr>
+                </a:tc>
+                <a:tc>
+                  <a:txBody>
+                    <a:bodyPr/>
+                    <a:lstStyle/>
+                    <a:p>
+                      <a:r>
+                        <a:rPr lang="en-US" sz="1100" b="0" dirty="0"/>
+                        <a:t>HIGH</a:t>
+                      </a:r>
+                    </a:p>
+                  </a:txBody>
+                  <a:tcPr>
+                    <a:solidFill>
+                      <a:srgbClr val="00B0F0"/>
+                    </a:solidFill>
+                  </a:tcPr>
+                </a:tc>
+                <a:extLst>
+                  <a:ext uri="{0D108BD9-81ED-4DB2-BD59-A6C34878D82A}">
+                    <a16:rowId xmlns:a16="http://schemas.microsoft.com/office/drawing/2014/main" val="423997675"/>
+                  </a:ext>
+                </a:extLst>
+              </a:tr>
+              <a:tr h="237327">
+                <a:tc>
+                  <a:txBody>
+                    <a:bodyPr/>
+                    <a:lstStyle/>
+                    <a:p>
+                      <a:r>
+                        <a:rPr lang="en-US" sz="1100" dirty="0">
+                          <a:solidFill>
+                            <a:schemeClr val="bg1"/>
+                          </a:solidFill>
+                        </a:rPr>
+                        <a:t>LOW</a:t>
+                      </a:r>
+                    </a:p>
+                  </a:txBody>
+                  <a:tcPr>
+                    <a:solidFill>
+                      <a:srgbClr val="FF3300"/>
+                    </a:solidFill>
+                  </a:tcPr>
+                </a:tc>
+                <a:tc>
+                  <a:txBody>
+                    <a:bodyPr/>
+                    <a:lstStyle/>
+                    <a:p>
+                      <a:r>
+                        <a:rPr lang="en-US" sz="1100" dirty="0"/>
+                        <a:t>Ignore</a:t>
+                      </a:r>
+                    </a:p>
+                  </a:txBody>
+                  <a:tcPr>
+                    <a:solidFill>
+                      <a:srgbClr val="FFC000"/>
+                    </a:solidFill>
+                  </a:tcPr>
+                </a:tc>
+                <a:tc>
+                  <a:txBody>
+                    <a:bodyPr/>
+                    <a:lstStyle/>
+                    <a:p>
+                      <a:r>
+                        <a:rPr lang="en-US" sz="1100" dirty="0"/>
+                        <a:t>Ignore</a:t>
+                      </a:r>
+                    </a:p>
+                  </a:txBody>
+                  <a:tcPr>
+                    <a:solidFill>
+                      <a:srgbClr val="FFC000"/>
+                    </a:solidFill>
+                  </a:tcPr>
+                </a:tc>
+                <a:tc>
+                  <a:txBody>
+                    <a:bodyPr/>
+                    <a:lstStyle/>
+                    <a:p>
+                      <a:pPr algn="l"/>
+                      <a:r>
+                        <a:rPr lang="en-US" sz="1100" dirty="0"/>
+                        <a:t>Consider</a:t>
+                      </a:r>
+                    </a:p>
+                  </a:txBody>
+                  <a:tcPr/>
+                </a:tc>
+                <a:extLst>
+                  <a:ext uri="{0D108BD9-81ED-4DB2-BD59-A6C34878D82A}">
+                    <a16:rowId xmlns:a16="http://schemas.microsoft.com/office/drawing/2014/main" val="1509479105"/>
+                  </a:ext>
+                </a:extLst>
+              </a:tr>
+              <a:tr h="237327">
+                <a:tc>
+                  <a:txBody>
+                    <a:bodyPr/>
+                    <a:lstStyle/>
+                    <a:p>
+                      <a:r>
+                        <a:rPr lang="en-US" sz="1100" dirty="0">
+                          <a:solidFill>
+                            <a:schemeClr val="bg1"/>
+                          </a:solidFill>
+                        </a:rPr>
+                        <a:t>MEDIUM</a:t>
+                      </a:r>
+                    </a:p>
+                  </a:txBody>
+                  <a:tcPr>
+                    <a:solidFill>
+                      <a:srgbClr val="FF3300"/>
+                    </a:solidFill>
+                  </a:tcPr>
+                </a:tc>
+                <a:tc>
+                  <a:txBody>
+                    <a:bodyPr/>
+                    <a:lstStyle/>
+                    <a:p>
+                      <a:r>
+                        <a:rPr lang="en-US" sz="1100" dirty="0"/>
+                        <a:t>Ignore</a:t>
+                      </a:r>
+                    </a:p>
+                  </a:txBody>
+                  <a:tcPr>
+                    <a:solidFill>
+                      <a:srgbClr val="FFC000"/>
+                    </a:solidFill>
+                  </a:tcPr>
+                </a:tc>
+                <a:tc>
+                  <a:txBody>
+                    <a:bodyPr/>
+                    <a:lstStyle/>
+                    <a:p>
+                      <a:r>
+                        <a:rPr lang="en-US" sz="1100" dirty="0"/>
+                        <a:t>Consider</a:t>
+                      </a:r>
+                    </a:p>
+                  </a:txBody>
+                  <a:tcPr/>
+                </a:tc>
+                <a:tc>
+                  <a:txBody>
+                    <a:bodyPr/>
+                    <a:lstStyle/>
+                    <a:p>
+                      <a:pPr algn="l"/>
+                      <a:r>
+                        <a:rPr lang="en-US" sz="1100" dirty="0"/>
+                        <a:t>Take Action</a:t>
+                      </a:r>
+                    </a:p>
+                  </a:txBody>
+                  <a:tcPr>
+                    <a:solidFill>
+                      <a:schemeClr val="accent6"/>
+                    </a:solidFill>
+                  </a:tcPr>
+                </a:tc>
+                <a:extLst>
+                  <a:ext uri="{0D108BD9-81ED-4DB2-BD59-A6C34878D82A}">
+                    <a16:rowId xmlns:a16="http://schemas.microsoft.com/office/drawing/2014/main" val="497235032"/>
+                  </a:ext>
+                </a:extLst>
+              </a:tr>
+              <a:tr h="339011">
+                <a:tc>
+                  <a:txBody>
+                    <a:bodyPr/>
+                    <a:lstStyle/>
+                    <a:p>
+                      <a:r>
+                        <a:rPr lang="en-US" sz="1100" dirty="0">
+                          <a:solidFill>
+                            <a:schemeClr val="bg1"/>
+                          </a:solidFill>
+                        </a:rPr>
+                        <a:t>HIGH</a:t>
+                      </a:r>
+                    </a:p>
+                  </a:txBody>
+                  <a:tcPr>
+                    <a:solidFill>
+                      <a:srgbClr val="FF3300"/>
+                    </a:solidFill>
+                  </a:tcPr>
+                </a:tc>
+                <a:tc>
+                  <a:txBody>
+                    <a:bodyPr/>
+                    <a:lstStyle/>
+                    <a:p>
+                      <a:r>
+                        <a:rPr lang="en-US" sz="1100" dirty="0"/>
+                        <a:t>Consider</a:t>
+                      </a:r>
+                    </a:p>
+                  </a:txBody>
+                  <a:tcPr/>
+                </a:tc>
+                <a:tc>
+                  <a:txBody>
+                    <a:bodyPr/>
+                    <a:lstStyle/>
+                    <a:p>
+                      <a:r>
+                        <a:rPr lang="en-US" sz="1100" dirty="0"/>
+                        <a:t>Take Action</a:t>
+                      </a:r>
+                    </a:p>
+                  </a:txBody>
+                  <a:tcPr>
+                    <a:solidFill>
+                      <a:schemeClr val="accent6"/>
+                    </a:solidFill>
+                  </a:tcPr>
+                </a:tc>
+                <a:tc>
+                  <a:txBody>
+                    <a:bodyPr/>
+                    <a:lstStyle/>
+                    <a:p>
+                      <a:pPr algn="l"/>
+                      <a:r>
+                        <a:rPr lang="en-US" sz="1100" dirty="0"/>
+                        <a:t>Take Action</a:t>
+                      </a:r>
+                    </a:p>
+                  </a:txBody>
+                  <a:tcPr>
+                    <a:solidFill>
+                      <a:schemeClr val="accent6"/>
+                    </a:solidFill>
+                  </a:tcPr>
+                </a:tc>
+                <a:extLst>
+                  <a:ext uri="{0D108BD9-81ED-4DB2-BD59-A6C34878D82A}">
+                    <a16:rowId xmlns:a16="http://schemas.microsoft.com/office/drawing/2014/main" val="3788833218"/>
+                  </a:ext>
+                </a:extLst>
+              </a:tr>
+            </a:tbl>
+          </a:graphicData>
+        </a:graphic>
+      </p:graphicFrame>
+      <p:graphicFrame>
+        <p:nvGraphicFramePr>
+          <p:cNvPr id="20" name="Table 20">
+            <a:extLst>
+              <a:ext uri="{FF2B5EF4-FFF2-40B4-BE49-F238E27FC236}">
+                <a16:creationId xmlns:a16="http://schemas.microsoft.com/office/drawing/2014/main" id="{FD20EDEA-D884-C290-8917-858E7F0661BD}"/>
+              </a:ext>
+            </a:extLst>
+          </p:cNvPr>
+          <p:cNvGraphicFramePr>
+            <a:graphicFrameLocks noGrp="1"/>
+          </p:cNvGraphicFramePr>
+          <p:nvPr>
+            <p:ph idx="1"/>
+            <p:extLst>
+              <p:ext uri="{D42A27DB-BD31-4B8C-83A1-F6EECF244321}">
+                <p14:modId xmlns:p14="http://schemas.microsoft.com/office/powerpoint/2010/main" val="2215526666"/>
+              </p:ext>
+            </p:extLst>
+          </p:nvPr>
+        </p:nvGraphicFramePr>
+        <p:xfrm>
+          <a:off x="102637" y="395308"/>
+          <a:ext cx="11989836" cy="4283838"/>
+        </p:xfrm>
+        <a:graphic>
+          <a:graphicData uri="http://schemas.openxmlformats.org/drawingml/2006/table">
+            <a:tbl>
+              <a:tblPr firstRow="1" bandRow="1">
+                <a:tableStyleId>{5C22544A-7EE6-4342-B048-85BDC9FD1C3A}</a:tableStyleId>
+              </a:tblPr>
+              <a:tblGrid>
+                <a:gridCol w="3648269">
+                  <a:extLst>
+                    <a:ext uri="{9D8B030D-6E8A-4147-A177-3AD203B41FA5}">
+                      <a16:colId xmlns:a16="http://schemas.microsoft.com/office/drawing/2014/main" val="306995991"/>
+                    </a:ext>
+                  </a:extLst>
+                </a:gridCol>
+                <a:gridCol w="1754155">
+                  <a:extLst>
+                    <a:ext uri="{9D8B030D-6E8A-4147-A177-3AD203B41FA5}">
+                      <a16:colId xmlns:a16="http://schemas.microsoft.com/office/drawing/2014/main" val="2006379726"/>
+                    </a:ext>
+                  </a:extLst>
+                </a:gridCol>
+                <a:gridCol w="1464906">
+                  <a:extLst>
+                    <a:ext uri="{9D8B030D-6E8A-4147-A177-3AD203B41FA5}">
+                      <a16:colId xmlns:a16="http://schemas.microsoft.com/office/drawing/2014/main" val="1476300161"/>
+                    </a:ext>
+                  </a:extLst>
+                </a:gridCol>
+                <a:gridCol w="1623527">
+                  <a:extLst>
+                    <a:ext uri="{9D8B030D-6E8A-4147-A177-3AD203B41FA5}">
+                      <a16:colId xmlns:a16="http://schemas.microsoft.com/office/drawing/2014/main" val="4142818946"/>
+                    </a:ext>
+                  </a:extLst>
+                </a:gridCol>
+                <a:gridCol w="3498979">
+                  <a:extLst>
+                    <a:ext uri="{9D8B030D-6E8A-4147-A177-3AD203B41FA5}">
+                      <a16:colId xmlns:a16="http://schemas.microsoft.com/office/drawing/2014/main" val="2785305796"/>
+                    </a:ext>
+                  </a:extLst>
+                </a:gridCol>
+              </a:tblGrid>
+              <a:tr h="393933">
+                <a:tc>
+                  <a:txBody>
+                    <a:bodyPr/>
+                    <a:lstStyle/>
+                    <a:p>
+                      <a:pPr algn="ctr"/>
+                      <a:r>
+                        <a:rPr lang="en-US" dirty="0"/>
+                        <a:t>RISK Analysis</a:t>
+                      </a:r>
+                    </a:p>
+                  </a:txBody>
+                  <a:tcPr/>
+                </a:tc>
+                <a:tc>
+                  <a:txBody>
+                    <a:bodyPr/>
+                    <a:lstStyle/>
+                    <a:p>
+                      <a:pPr algn="ctr"/>
+                      <a:r>
+                        <a:rPr lang="en-US" dirty="0"/>
+                        <a:t>Probability</a:t>
+                      </a:r>
+                    </a:p>
+                  </a:txBody>
+                  <a:tcPr/>
+                </a:tc>
+                <a:tc>
+                  <a:txBody>
+                    <a:bodyPr/>
+                    <a:lstStyle/>
+                    <a:p>
+                      <a:pPr algn="ctr"/>
+                      <a:r>
+                        <a:rPr lang="en-US" dirty="0"/>
+                        <a:t>Impact</a:t>
+                      </a:r>
+                    </a:p>
+                  </a:txBody>
+                  <a:tcPr/>
+                </a:tc>
+                <a:tc>
+                  <a:txBody>
+                    <a:bodyPr/>
+                    <a:lstStyle/>
+                    <a:p>
+                      <a:pPr algn="ctr"/>
+                      <a:r>
+                        <a:rPr lang="en-US" dirty="0"/>
+                        <a:t>RISK Weight</a:t>
+                      </a:r>
+                    </a:p>
+                  </a:txBody>
+                  <a:tcPr/>
+                </a:tc>
+                <a:tc>
+                  <a:txBody>
+                    <a:bodyPr/>
+                    <a:lstStyle/>
+                    <a:p>
+                      <a:pPr algn="ctr"/>
+                      <a:r>
+                        <a:rPr lang="en-US" dirty="0"/>
+                        <a:t>Action Taken</a:t>
+                      </a:r>
+                    </a:p>
+                  </a:txBody>
+                  <a:tcPr/>
+                </a:tc>
+                <a:extLst>
+                  <a:ext uri="{0D108BD9-81ED-4DB2-BD59-A6C34878D82A}">
+                    <a16:rowId xmlns:a16="http://schemas.microsoft.com/office/drawing/2014/main" val="2066679566"/>
+                  </a:ext>
+                </a:extLst>
+              </a:tr>
+              <a:tr h="393933">
+                <a:tc>
+                  <a:txBody>
+                    <a:bodyPr/>
+                    <a:lstStyle/>
+                    <a:p>
+                      <a:r>
+                        <a:rPr lang="en-US" dirty="0">
+                          <a:solidFill>
+                            <a:schemeClr val="bg1"/>
+                          </a:solidFill>
+                        </a:rPr>
+                        <a:t>Data Loss</a:t>
+                      </a:r>
+                    </a:p>
+                  </a:txBody>
+                  <a:tcPr>
+                    <a:solidFill>
+                      <a:schemeClr val="accent2">
+                        <a:lumMod val="75000"/>
+                      </a:schemeClr>
+                    </a:solidFill>
+                  </a:tcPr>
+                </a:tc>
+                <a:tc>
+                  <a:txBody>
+                    <a:bodyPr/>
+                    <a:lstStyle/>
+                    <a:p>
+                      <a:r>
+                        <a:rPr lang="en-US" dirty="0"/>
+                        <a:t>Medium</a:t>
+                      </a:r>
+                    </a:p>
+                  </a:txBody>
+                  <a:tcPr/>
+                </a:tc>
+                <a:tc>
+                  <a:txBody>
+                    <a:bodyPr/>
+                    <a:lstStyle/>
+                    <a:p>
+                      <a:r>
+                        <a:rPr lang="en-US" dirty="0"/>
+                        <a:t>High</a:t>
+                      </a:r>
+                    </a:p>
+                  </a:txBody>
+                  <a:tcPr/>
+                </a:tc>
+                <a:tc>
+                  <a:txBody>
+                    <a:bodyPr/>
+                    <a:lstStyle/>
+                    <a:p>
+                      <a:r>
+                        <a:rPr lang="en-US" dirty="0"/>
+                        <a:t>Take Action</a:t>
+                      </a:r>
+                    </a:p>
+                  </a:txBody>
+                  <a:tcPr/>
+                </a:tc>
+                <a:tc>
+                  <a:txBody>
+                    <a:bodyPr/>
+                    <a:lstStyle/>
+                    <a:p>
+                      <a:r>
+                        <a:rPr lang="en-US" dirty="0"/>
+                        <a:t>Allowed automatic  backup on cloud</a:t>
+                      </a:r>
+                    </a:p>
+                  </a:txBody>
+                  <a:tcPr/>
+                </a:tc>
+                <a:extLst>
+                  <a:ext uri="{0D108BD9-81ED-4DB2-BD59-A6C34878D82A}">
+                    <a16:rowId xmlns:a16="http://schemas.microsoft.com/office/drawing/2014/main" val="3933104338"/>
+                  </a:ext>
+                </a:extLst>
+              </a:tr>
+              <a:tr h="393933">
+                <a:tc>
+                  <a:txBody>
+                    <a:bodyPr/>
+                    <a:lstStyle/>
+                    <a:p>
+                      <a:r>
+                        <a:rPr lang="en-US" dirty="0">
+                          <a:solidFill>
+                            <a:schemeClr val="bg1"/>
+                          </a:solidFill>
+                        </a:rPr>
+                        <a:t>Laptop Malfunctioning/Fails</a:t>
+                      </a:r>
+                    </a:p>
+                  </a:txBody>
+                  <a:tcPr>
+                    <a:solidFill>
+                      <a:schemeClr val="accent2">
+                        <a:lumMod val="75000"/>
+                      </a:schemeClr>
+                    </a:solidFill>
+                  </a:tcPr>
+                </a:tc>
+                <a:tc>
+                  <a:txBody>
+                    <a:bodyPr/>
+                    <a:lstStyle/>
+                    <a:p>
+                      <a:r>
+                        <a:rPr lang="en-US" dirty="0"/>
+                        <a:t>Low</a:t>
+                      </a:r>
+                    </a:p>
+                  </a:txBody>
+                  <a:tcPr/>
+                </a:tc>
+                <a:tc>
+                  <a:txBody>
+                    <a:bodyPr/>
+                    <a:lstStyle/>
+                    <a:p>
+                      <a:r>
+                        <a:rPr lang="en-US" dirty="0"/>
+                        <a:t>High</a:t>
+                      </a:r>
+                    </a:p>
+                  </a:txBody>
+                  <a:tcPr/>
+                </a:tc>
+                <a:tc>
+                  <a:txBody>
+                    <a:bodyPr/>
+                    <a:lstStyle/>
+                    <a:p>
+                      <a:r>
+                        <a:rPr lang="en-US" dirty="0"/>
+                        <a:t>Consider</a:t>
+                      </a:r>
+                    </a:p>
+                  </a:txBody>
+                  <a:tcPr/>
+                </a:tc>
+                <a:tc>
+                  <a:txBody>
+                    <a:bodyPr/>
+                    <a:lstStyle/>
+                    <a:p>
+                      <a:r>
+                        <a:rPr lang="en-US" dirty="0"/>
+                        <a:t>Already searched for another </a:t>
+                      </a:r>
+                    </a:p>
+                  </a:txBody>
+                  <a:tcPr/>
+                </a:tc>
+                <a:extLst>
+                  <a:ext uri="{0D108BD9-81ED-4DB2-BD59-A6C34878D82A}">
+                    <a16:rowId xmlns:a16="http://schemas.microsoft.com/office/drawing/2014/main" val="2151315953"/>
+                  </a:ext>
+                </a:extLst>
+              </a:tr>
+              <a:tr h="393933">
+                <a:tc>
+                  <a:txBody>
+                    <a:bodyPr/>
+                    <a:lstStyle/>
+                    <a:p>
+                      <a:r>
+                        <a:rPr lang="en-US" dirty="0">
+                          <a:solidFill>
+                            <a:schemeClr val="bg1"/>
+                          </a:solidFill>
+                        </a:rPr>
+                        <a:t>If  Video not get Uploaded </a:t>
+                      </a:r>
+                    </a:p>
+                  </a:txBody>
+                  <a:tcPr>
+                    <a:solidFill>
+                      <a:schemeClr val="accent2">
+                        <a:lumMod val="75000"/>
+                      </a:schemeClr>
+                    </a:solidFill>
+                  </a:tcPr>
+                </a:tc>
+                <a:tc>
+                  <a:txBody>
+                    <a:bodyPr/>
+                    <a:lstStyle/>
+                    <a:p>
+                      <a:r>
+                        <a:rPr lang="en-US" dirty="0"/>
+                        <a:t>Low</a:t>
+                      </a:r>
+                    </a:p>
+                  </a:txBody>
+                  <a:tcPr/>
+                </a:tc>
+                <a:tc>
+                  <a:txBody>
+                    <a:bodyPr/>
+                    <a:lstStyle/>
+                    <a:p>
+                      <a:r>
+                        <a:rPr lang="en-US" dirty="0"/>
+                        <a:t>High</a:t>
+                      </a:r>
+                    </a:p>
+                  </a:txBody>
+                  <a:tcPr/>
+                </a:tc>
+                <a:tc>
+                  <a:txBody>
+                    <a:bodyPr/>
+                    <a:lstStyle/>
+                    <a:p>
+                      <a:r>
+                        <a:rPr lang="en-US" dirty="0"/>
+                        <a:t>Consider</a:t>
+                      </a:r>
+                    </a:p>
+                  </a:txBody>
+                  <a:tcPr/>
+                </a:tc>
+                <a:tc>
+                  <a:txBody>
+                    <a:bodyPr/>
+                    <a:lstStyle/>
+                    <a:p>
+                      <a:r>
+                        <a:rPr lang="en-US" dirty="0"/>
+                        <a:t>Searched for alternate platform (</a:t>
+                      </a:r>
+                      <a:r>
+                        <a:rPr lang="en-US" dirty="0" err="1"/>
+                        <a:t>e.g</a:t>
+                      </a:r>
+                      <a:r>
+                        <a:rPr lang="en-US" dirty="0"/>
+                        <a:t>- VIMEO )</a:t>
+                      </a:r>
+                    </a:p>
+                  </a:txBody>
+                  <a:tcPr/>
+                </a:tc>
+                <a:extLst>
+                  <a:ext uri="{0D108BD9-81ED-4DB2-BD59-A6C34878D82A}">
+                    <a16:rowId xmlns:a16="http://schemas.microsoft.com/office/drawing/2014/main" val="29131308"/>
+                  </a:ext>
+                </a:extLst>
+              </a:tr>
+              <a:tr h="393933">
+                <a:tc>
+                  <a:txBody>
+                    <a:bodyPr/>
+                    <a:lstStyle/>
+                    <a:p>
+                      <a:r>
+                        <a:rPr lang="en-US" dirty="0">
+                          <a:solidFill>
+                            <a:schemeClr val="bg1"/>
+                          </a:solidFill>
+                        </a:rPr>
+                        <a:t>Video Plat. Not working on Presentation Day</a:t>
+                      </a:r>
+                    </a:p>
+                  </a:txBody>
+                  <a:tcPr>
+                    <a:solidFill>
+                      <a:schemeClr val="accent2">
+                        <a:lumMod val="75000"/>
+                      </a:schemeClr>
+                    </a:solidFill>
+                  </a:tcPr>
+                </a:tc>
+                <a:tc>
+                  <a:txBody>
+                    <a:bodyPr/>
+                    <a:lstStyle/>
+                    <a:p>
+                      <a:r>
+                        <a:rPr lang="en-US" dirty="0"/>
+                        <a:t>Low</a:t>
+                      </a:r>
+                    </a:p>
+                  </a:txBody>
+                  <a:tcPr/>
+                </a:tc>
+                <a:tc>
+                  <a:txBody>
+                    <a:bodyPr/>
+                    <a:lstStyle/>
+                    <a:p>
+                      <a:r>
+                        <a:rPr lang="en-US" dirty="0"/>
+                        <a:t>High</a:t>
+                      </a:r>
+                    </a:p>
+                  </a:txBody>
+                  <a:tcPr/>
+                </a:tc>
+                <a:tc>
+                  <a:txBody>
+                    <a:bodyPr/>
+                    <a:lstStyle/>
+                    <a:p>
+                      <a:r>
+                        <a:rPr lang="en-US" dirty="0"/>
+                        <a:t>Consider</a:t>
+                      </a:r>
+                    </a:p>
+                  </a:txBody>
+                  <a:tcPr/>
+                </a:tc>
+                <a:tc>
+                  <a:txBody>
+                    <a:bodyPr/>
+                    <a:lstStyle/>
+                    <a:p>
+                      <a:r>
+                        <a:rPr lang="en-US" dirty="0"/>
+                        <a:t>Check how to upload video but do not took any action</a:t>
+                      </a:r>
+                    </a:p>
+                  </a:txBody>
+                  <a:tcPr/>
+                </a:tc>
+                <a:extLst>
+                  <a:ext uri="{0D108BD9-81ED-4DB2-BD59-A6C34878D82A}">
+                    <a16:rowId xmlns:a16="http://schemas.microsoft.com/office/drawing/2014/main" val="2858115616"/>
+                  </a:ext>
+                </a:extLst>
+              </a:tr>
+              <a:tr h="393933">
+                <a:tc>
+                  <a:txBody>
+                    <a:bodyPr/>
+                    <a:lstStyle/>
+                    <a:p>
+                      <a:r>
+                        <a:rPr lang="en-US" dirty="0">
+                          <a:solidFill>
+                            <a:schemeClr val="bg1"/>
+                          </a:solidFill>
+                        </a:rPr>
+                        <a:t>Video Editing tool</a:t>
+                      </a:r>
+                    </a:p>
+                  </a:txBody>
+                  <a:tcPr>
+                    <a:solidFill>
+                      <a:srgbClr val="009900"/>
+                    </a:solidFill>
+                  </a:tcPr>
+                </a:tc>
+                <a:tc>
+                  <a:txBody>
+                    <a:bodyPr/>
+                    <a:lstStyle/>
+                    <a:p>
+                      <a:r>
+                        <a:rPr lang="en-US" dirty="0"/>
+                        <a:t>High</a:t>
+                      </a:r>
+                    </a:p>
+                  </a:txBody>
+                  <a:tcPr/>
+                </a:tc>
+                <a:tc>
+                  <a:txBody>
+                    <a:bodyPr/>
+                    <a:lstStyle/>
+                    <a:p>
+                      <a:r>
+                        <a:rPr lang="en-US" dirty="0"/>
+                        <a:t>Hight</a:t>
+                      </a:r>
+                    </a:p>
+                  </a:txBody>
+                  <a:tcPr/>
+                </a:tc>
+                <a:tc>
+                  <a:txBody>
+                    <a:bodyPr/>
+                    <a:lstStyle/>
+                    <a:p>
+                      <a:r>
+                        <a:rPr lang="en-US" dirty="0"/>
+                        <a:t>Take Action</a:t>
+                      </a:r>
+                    </a:p>
+                  </a:txBody>
+                  <a:tcPr/>
+                </a:tc>
+                <a:tc>
+                  <a:txBody>
+                    <a:bodyPr/>
+                    <a:lstStyle/>
+                    <a:p>
+                      <a:r>
+                        <a:rPr lang="en-US" dirty="0"/>
+                        <a:t>Learned Editing Online</a:t>
+                      </a:r>
+                    </a:p>
+                  </a:txBody>
+                  <a:tcPr/>
+                </a:tc>
+                <a:extLst>
+                  <a:ext uri="{0D108BD9-81ED-4DB2-BD59-A6C34878D82A}">
+                    <a16:rowId xmlns:a16="http://schemas.microsoft.com/office/drawing/2014/main" val="246254319"/>
+                  </a:ext>
+                </a:extLst>
+              </a:tr>
+              <a:tr h="393933">
+                <a:tc>
+                  <a:txBody>
+                    <a:bodyPr/>
+                    <a:lstStyle/>
+                    <a:p>
+                      <a:r>
+                        <a:rPr lang="en-US" dirty="0">
+                          <a:solidFill>
+                            <a:schemeClr val="bg1"/>
+                          </a:solidFill>
+                        </a:rPr>
+                        <a:t>Unavailability of External Mike</a:t>
+                      </a:r>
+                    </a:p>
+                  </a:txBody>
+                  <a:tcPr>
+                    <a:solidFill>
+                      <a:srgbClr val="009900"/>
+                    </a:solidFill>
+                  </a:tcPr>
+                </a:tc>
+                <a:tc>
+                  <a:txBody>
+                    <a:bodyPr/>
+                    <a:lstStyle/>
+                    <a:p>
+                      <a:r>
+                        <a:rPr lang="en-US" dirty="0"/>
+                        <a:t>High</a:t>
+                      </a:r>
+                    </a:p>
+                  </a:txBody>
+                  <a:tcPr/>
+                </a:tc>
+                <a:tc>
+                  <a:txBody>
+                    <a:bodyPr/>
+                    <a:lstStyle/>
+                    <a:p>
+                      <a:r>
+                        <a:rPr lang="en-US" dirty="0"/>
+                        <a:t>Medium</a:t>
+                      </a:r>
+                    </a:p>
+                  </a:txBody>
+                  <a:tcPr/>
+                </a:tc>
+                <a:tc>
+                  <a:txBody>
+                    <a:bodyPr/>
+                    <a:lstStyle/>
+                    <a:p>
+                      <a:r>
+                        <a:rPr lang="en-US" dirty="0"/>
+                        <a:t>Take Action</a:t>
+                      </a:r>
+                    </a:p>
+                  </a:txBody>
+                  <a:tcPr/>
+                </a:tc>
+                <a:tc>
+                  <a:txBody>
+                    <a:bodyPr/>
+                    <a:lstStyle/>
+                    <a:p>
+                      <a:r>
+                        <a:rPr lang="en-US" dirty="0"/>
+                        <a:t>Arranged it with Other Person </a:t>
+                      </a:r>
+                    </a:p>
+                  </a:txBody>
+                  <a:tcPr/>
+                </a:tc>
+                <a:extLst>
+                  <a:ext uri="{0D108BD9-81ED-4DB2-BD59-A6C34878D82A}">
+                    <a16:rowId xmlns:a16="http://schemas.microsoft.com/office/drawing/2014/main" val="1699099540"/>
+                  </a:ext>
+                </a:extLst>
+              </a:tr>
+              <a:tr h="393933">
+                <a:tc>
+                  <a:txBody>
+                    <a:bodyPr/>
+                    <a:lstStyle/>
+                    <a:p>
+                      <a:r>
+                        <a:rPr lang="en-US" dirty="0">
+                          <a:solidFill>
+                            <a:schemeClr val="bg1"/>
+                          </a:solidFill>
+                        </a:rPr>
+                        <a:t>Same Facial Expression Every time</a:t>
+                      </a:r>
+                    </a:p>
+                  </a:txBody>
+                  <a:tcPr>
+                    <a:solidFill>
+                      <a:srgbClr val="009900"/>
+                    </a:solidFill>
+                  </a:tcPr>
+                </a:tc>
+                <a:tc>
+                  <a:txBody>
+                    <a:bodyPr/>
+                    <a:lstStyle/>
+                    <a:p>
+                      <a:r>
+                        <a:rPr lang="en-US" dirty="0"/>
+                        <a:t>Medium</a:t>
+                      </a:r>
+                    </a:p>
+                  </a:txBody>
+                  <a:tcPr/>
+                </a:tc>
+                <a:tc>
+                  <a:txBody>
+                    <a:bodyPr/>
+                    <a:lstStyle/>
+                    <a:p>
+                      <a:r>
+                        <a:rPr lang="en-US" dirty="0"/>
+                        <a:t>Medium</a:t>
+                      </a:r>
+                    </a:p>
+                  </a:txBody>
+                  <a:tcPr/>
+                </a:tc>
+                <a:tc>
+                  <a:txBody>
+                    <a:bodyPr/>
+                    <a:lstStyle/>
+                    <a:p>
+                      <a:r>
+                        <a:rPr lang="en-US" dirty="0"/>
+                        <a:t>Consider</a:t>
+                      </a:r>
+                    </a:p>
+                  </a:txBody>
+                  <a:tcPr/>
+                </a:tc>
+                <a:tc>
+                  <a:txBody>
+                    <a:bodyPr/>
+                    <a:lstStyle/>
+                    <a:p>
+                      <a:r>
+                        <a:rPr lang="en-US" dirty="0"/>
+                        <a:t>Did Rehearsal </a:t>
+                      </a:r>
+                    </a:p>
+                  </a:txBody>
+                  <a:tcPr/>
+                </a:tc>
+                <a:extLst>
+                  <a:ext uri="{0D108BD9-81ED-4DB2-BD59-A6C34878D82A}">
+                    <a16:rowId xmlns:a16="http://schemas.microsoft.com/office/drawing/2014/main" val="1900882598"/>
+                  </a:ext>
+                </a:extLst>
+              </a:tr>
+              <a:tr h="393933">
+                <a:tc>
+                  <a:txBody>
+                    <a:bodyPr/>
+                    <a:lstStyle/>
+                    <a:p>
+                      <a:endParaRPr lang="en-US" dirty="0">
+                        <a:solidFill>
+                          <a:schemeClr val="bg1"/>
+                        </a:solidFill>
+                      </a:endParaRPr>
+                    </a:p>
+                  </a:txBody>
+                  <a:tcPr>
+                    <a:solidFill>
+                      <a:srgbClr val="009900"/>
+                    </a:solidFill>
+                  </a:tcPr>
+                </a:tc>
+                <a:tc>
+                  <a:txBody>
+                    <a:bodyPr/>
+                    <a:lstStyle/>
+                    <a:p>
+                      <a:endParaRPr lang="en-US" dirty="0"/>
+                    </a:p>
+                  </a:txBody>
+                  <a:tcPr/>
+                </a:tc>
+                <a:tc>
+                  <a:txBody>
+                    <a:bodyPr/>
+                    <a:lstStyle/>
+                    <a:p>
+                      <a:endParaRPr lang="en-US"/>
+                    </a:p>
+                  </a:txBody>
+                  <a:tcPr/>
+                </a:tc>
+                <a:tc>
+                  <a:txBody>
+                    <a:bodyPr/>
+                    <a:lstStyle/>
+                    <a:p>
+                      <a:endParaRPr lang="en-US" dirty="0"/>
+                    </a:p>
+                  </a:txBody>
+                  <a:tcPr/>
+                </a:tc>
+                <a:tc>
+                  <a:txBody>
+                    <a:bodyPr/>
+                    <a:lstStyle/>
+                    <a:p>
+                      <a:endParaRPr lang="en-US" dirty="0"/>
+                    </a:p>
+                  </a:txBody>
+                  <a:tcPr/>
+                </a:tc>
+                <a:extLst>
+                  <a:ext uri="{0D108BD9-81ED-4DB2-BD59-A6C34878D82A}">
+                    <a16:rowId xmlns:a16="http://schemas.microsoft.com/office/drawing/2014/main" val="2565877044"/>
+                  </a:ext>
+                </a:extLst>
+              </a:tr>
+            </a:tbl>
+          </a:graphicData>
+        </a:graphic>
+      </p:graphicFrame>
+    </p:spTree>
+    <p:extLst>
+      <p:ext uri="{BB962C8B-B14F-4D97-AF65-F5344CB8AC3E}">
+        <p14:creationId xmlns:p14="http://schemas.microsoft.com/office/powerpoint/2010/main" val="1280320867"/>
+      </p:ext>
+    </p:extLst>
+  </p:cSld>
+  <p:clrMapOvr>
+    <a:masterClrMapping/>
+  </p:clrMapOvr>
+  <p:transition spd="slow">
+    <p:push dir="u"/>
+  </p:transition>
+</p:sld>
+</file>
+
+<file path=ppt/slides/slide11.xml><?xml version="1.0" encoding="utf-8"?>
+<p:sld xmlns:a="http://schemas.openxmlformats.org/drawingml/2006/main" xmlns:r="http://schemas.openxmlformats.org/officeDocument/2006/relationships" xmlns:p="http://schemas.openxmlformats.org/presentationml/2006/main">
+  <p:cSld>
+    <p:spTree>
+      <p:nvGrpSpPr>
+        <p:cNvPr id="1" name=""/>
+        <p:cNvGrpSpPr/>
+        <p:nvPr/>
+      </p:nvGrpSpPr>
+      <p:grpSpPr>
+        <a:xfrm>
+          <a:off x="0" y="0"/>
+          <a:ext cx="0" cy="0"/>
+          <a:chOff x="0" y="0"/>
+          <a:chExt cx="0" cy="0"/>
+        </a:xfrm>
+      </p:grpSpPr>
+      <p:sp>
+        <p:nvSpPr>
+          <p:cNvPr id="2" name="TextBox 1">
+            <a:extLst>
+              <a:ext uri="{FF2B5EF4-FFF2-40B4-BE49-F238E27FC236}">
+                <a16:creationId xmlns:a16="http://schemas.microsoft.com/office/drawing/2014/main" id="{C4760F46-3539-254F-7CF9-A3F5E6A0A3F0}"/>
+              </a:ext>
+            </a:extLst>
+          </p:cNvPr>
+          <p:cNvSpPr txBox="1"/>
+          <p:nvPr/>
+        </p:nvSpPr>
+        <p:spPr>
+          <a:xfrm>
+            <a:off x="149290" y="214604"/>
+            <a:ext cx="11905861" cy="3731406"/>
+          </a:xfrm>
+          <a:prstGeom prst="rect">
+            <a:avLst/>
+          </a:prstGeom>
+          <a:noFill/>
+        </p:spPr>
+        <p:txBody>
+          <a:bodyPr wrap="square" rtlCol="0">
+            <a:spAutoFit/>
+          </a:bodyPr>
+          <a:lstStyle/>
+          <a:p>
+            <a:r>
+              <a:rPr lang="en-US" dirty="0"/>
+              <a:t>                                                  </a:t>
+            </a:r>
+            <a:r>
+              <a:rPr lang="en-US" sz="3200" b="1" u="sng" dirty="0"/>
+              <a:t>VIDEO PRESENTATION</a:t>
+            </a:r>
+          </a:p>
+          <a:p>
+            <a:endParaRPr lang="en-US" sz="3200" b="1" u="sng" dirty="0"/>
+          </a:p>
+          <a:p>
+            <a:r>
+              <a:rPr lang="en-US" sz="2800" u="sng" dirty="0"/>
+              <a:t>Details:</a:t>
+            </a:r>
+          </a:p>
+          <a:p>
+            <a:endParaRPr lang="en-US" sz="2800" u="sng" dirty="0"/>
+          </a:p>
+          <a:p>
+            <a:pPr marL="342900" indent="-342900">
+              <a:lnSpc>
+                <a:spcPct val="150000"/>
+              </a:lnSpc>
+              <a:buFont typeface="Arial" panose="020B0604020202020204" pitchFamily="34" charset="0"/>
+              <a:buChar char="•"/>
+            </a:pPr>
+            <a:r>
+              <a:rPr lang="en-US" sz="2000" dirty="0"/>
+              <a:t>Title: Video Curriculum | SAURAV ANAND | UNIPV 2023</a:t>
+            </a:r>
+          </a:p>
+          <a:p>
+            <a:pPr marL="342900" indent="-342900">
+              <a:lnSpc>
+                <a:spcPct val="150000"/>
+              </a:lnSpc>
+              <a:buFont typeface="Arial" panose="020B0604020202020204" pitchFamily="34" charset="0"/>
+              <a:buChar char="•"/>
+            </a:pPr>
+            <a:r>
+              <a:rPr lang="en-US" sz="2000" dirty="0"/>
+              <a:t>Software Used:  VN App, Team Gantt, Infinity free. Draw.net, </a:t>
+            </a:r>
+            <a:r>
+              <a:rPr lang="en-US" sz="2000" dirty="0" err="1"/>
+              <a:t>Youtube</a:t>
+            </a:r>
+            <a:r>
+              <a:rPr lang="en-US" sz="2000" dirty="0"/>
+              <a:t> Studio, Visual Studio</a:t>
+            </a:r>
+          </a:p>
+          <a:p>
+            <a:pPr marL="342900" indent="-342900">
+              <a:lnSpc>
+                <a:spcPct val="150000"/>
+              </a:lnSpc>
+              <a:buFont typeface="Arial" panose="020B0604020202020204" pitchFamily="34" charset="0"/>
+              <a:buChar char="•"/>
+            </a:pPr>
+            <a:r>
+              <a:rPr lang="en-US" sz="2000" dirty="0"/>
+              <a:t>Hardware Used: Phone Camera, Microphone, Personal Laptop</a:t>
+            </a:r>
+          </a:p>
+          <a:p>
+            <a:pPr marL="342900" indent="-342900">
+              <a:lnSpc>
+                <a:spcPct val="150000"/>
+              </a:lnSpc>
+              <a:buFont typeface="Arial" panose="020B0604020202020204" pitchFamily="34" charset="0"/>
+              <a:buChar char="•"/>
+            </a:pPr>
+            <a:r>
+              <a:rPr lang="en-US" sz="2000" dirty="0"/>
+              <a:t>Compression is done using the VN app using app’s default algorithm.</a:t>
+            </a:r>
+          </a:p>
+        </p:txBody>
+      </p:sp>
+    </p:spTree>
+    <p:extLst>
+      <p:ext uri="{BB962C8B-B14F-4D97-AF65-F5344CB8AC3E}">
+        <p14:creationId xmlns:p14="http://schemas.microsoft.com/office/powerpoint/2010/main" val="1306476052"/>
+      </p:ext>
+    </p:extLst>
+  </p:cSld>
+  <p:clrMapOvr>
+    <a:masterClrMapping/>
+  </p:clrMapOvr>
+  <p:transition spd="slow">
+    <p:push dir="u"/>
+  </p:transition>
+</p:sld>
+</file>
+
+<file path=ppt/slides/slide12.xml><?xml version="1.0" encoding="utf-8"?>
+<p:sld xmlns:a="http://schemas.openxmlformats.org/drawingml/2006/main" xmlns:r="http://schemas.openxmlformats.org/officeDocument/2006/relationships" xmlns:p="http://schemas.openxmlformats.org/presentationml/2006/main">
+  <p:cSld>
+    <p:spTree>
+      <p:nvGrpSpPr>
+        <p:cNvPr id="1" name=""/>
+        <p:cNvGrpSpPr/>
+        <p:nvPr/>
+      </p:nvGrpSpPr>
+      <p:grpSpPr>
+        <a:xfrm>
+          <a:off x="0" y="0"/>
+          <a:ext cx="0" cy="0"/>
+          <a:chOff x="0" y="0"/>
+          <a:chExt cx="0" cy="0"/>
+        </a:xfrm>
+      </p:grpSpPr>
+      <p:sp>
+        <p:nvSpPr>
+          <p:cNvPr id="2" name="TextBox 1">
+            <a:extLst>
+              <a:ext uri="{FF2B5EF4-FFF2-40B4-BE49-F238E27FC236}">
+                <a16:creationId xmlns:a16="http://schemas.microsoft.com/office/drawing/2014/main" id="{371289E5-BEBC-1C12-2F1C-FB0588235742}"/>
+              </a:ext>
+            </a:extLst>
+          </p:cNvPr>
+          <p:cNvSpPr txBox="1"/>
+          <p:nvPr/>
+        </p:nvSpPr>
+        <p:spPr>
+          <a:xfrm>
+            <a:off x="307910" y="270588"/>
+            <a:ext cx="11709919" cy="1569660"/>
+          </a:xfrm>
+          <a:prstGeom prst="rect">
+            <a:avLst/>
+          </a:prstGeom>
+          <a:noFill/>
+        </p:spPr>
+        <p:txBody>
+          <a:bodyPr wrap="square" rtlCol="0">
+            <a:spAutoFit/>
+          </a:bodyPr>
+          <a:lstStyle/>
+          <a:p>
+            <a:r>
+              <a:rPr lang="en-US" sz="3200" dirty="0"/>
+              <a:t>                             </a:t>
+            </a:r>
+            <a:r>
+              <a:rPr lang="en-US" sz="3200" u="sng" dirty="0"/>
+              <a:t>VIDEO PRESENTATION</a:t>
+            </a:r>
+          </a:p>
+          <a:p>
+            <a:endParaRPr lang="en-US" sz="3200" u="sng" dirty="0"/>
+          </a:p>
+          <a:p>
+            <a:pPr marL="457200" indent="-457200">
+              <a:buFont typeface="Arial" panose="020B0604020202020204" pitchFamily="34" charset="0"/>
+              <a:buChar char="•"/>
+            </a:pPr>
+            <a:endParaRPr lang="en-US" sz="3200" u="sng" dirty="0"/>
+          </a:p>
+        </p:txBody>
+      </p:sp>
+      <p:sp>
+        <p:nvSpPr>
+          <p:cNvPr id="5" name="TextBox 4">
+            <a:extLst>
+              <a:ext uri="{FF2B5EF4-FFF2-40B4-BE49-F238E27FC236}">
+                <a16:creationId xmlns:a16="http://schemas.microsoft.com/office/drawing/2014/main" id="{00B8AA77-A0D2-95CA-0BE9-B868F0E5ED06}"/>
+              </a:ext>
+            </a:extLst>
+          </p:cNvPr>
+          <p:cNvSpPr txBox="1"/>
+          <p:nvPr/>
+        </p:nvSpPr>
+        <p:spPr>
+          <a:xfrm>
+            <a:off x="2696548" y="4760050"/>
+            <a:ext cx="7203233" cy="369332"/>
+          </a:xfrm>
+          <a:prstGeom prst="rect">
+            <a:avLst/>
+          </a:prstGeom>
+          <a:noFill/>
+        </p:spPr>
+        <p:txBody>
+          <a:bodyPr wrap="square" rtlCol="0">
+            <a:spAutoFit/>
+          </a:bodyPr>
+          <a:lstStyle/>
+          <a:p>
+            <a:r>
+              <a:rPr lang="en-US" dirty="0"/>
+              <a:t>Source Link- </a:t>
+            </a:r>
+            <a:r>
+              <a:rPr lang="en-US" u="sng" dirty="0">
+                <a:solidFill>
+                  <a:srgbClr val="00B0F0"/>
+                </a:solidFill>
+              </a:rPr>
+              <a:t>https://www.youtube.com/watch?v=WBVuzWo94o4</a:t>
+            </a:r>
+          </a:p>
+        </p:txBody>
+      </p:sp>
+      <p:pic>
+        <p:nvPicPr>
+          <p:cNvPr id="3" name="Online Media 2" title="Video Curriculum | SAURAV ANAND | UNIPV- 2023">
+            <a:hlinkClick r:id="" action="ppaction://media"/>
+            <a:extLst>
+              <a:ext uri="{FF2B5EF4-FFF2-40B4-BE49-F238E27FC236}">
+                <a16:creationId xmlns:a16="http://schemas.microsoft.com/office/drawing/2014/main" id="{099401DF-EAF2-ABB6-DAF8-1EF9D23261BF}"/>
+              </a:ext>
+            </a:extLst>
+          </p:cNvPr>
+          <p:cNvPicPr>
+            <a:picLocks noRot="1" noChangeAspect="1"/>
+          </p:cNvPicPr>
+          <p:nvPr>
+            <a:videoFile r:link="rId1"/>
+          </p:nvPr>
+        </p:nvPicPr>
+        <p:blipFill>
+          <a:blip r:embed="rId3"/>
+          <a:stretch>
+            <a:fillRect/>
+          </a:stretch>
+        </p:blipFill>
+        <p:spPr>
+          <a:xfrm>
+            <a:off x="3015861" y="1297195"/>
+            <a:ext cx="5126103" cy="2896248"/>
+          </a:xfrm>
+          <a:prstGeom prst="rect">
+            <a:avLst/>
+          </a:prstGeom>
+        </p:spPr>
+      </p:pic>
+    </p:spTree>
+    <p:extLst>
+      <p:ext uri="{BB962C8B-B14F-4D97-AF65-F5344CB8AC3E}">
+        <p14:creationId xmlns:p14="http://schemas.microsoft.com/office/powerpoint/2010/main" val="3631153188"/>
+      </p:ext>
+    </p:extLst>
+  </p:cSld>
+  <p:clrMapOvr>
+    <a:masterClrMapping/>
+  </p:clrMapOvr>
+  <p:transition spd="slow">
+    <p:push dir="u"/>
+  </p:transition>
+  <p:timing>
+    <p:tnLst>
+      <p:par>
+        <p:cTn id="1" dur="indefinite" restart="never" nodeType="tmRoot">
+          <p:childTnLst>
+            <p:seq concurrent="1" nextAc="seek">
+              <p:cTn id="2" dur="indefinite" nodeType="mainSeq">
+                <p:childTnLst>
+                  <p:par>
+                    <p:cTn id="3" fill="hold">
+                      <p:stCondLst>
+                        <p:cond delay="indefinite"/>
+                      </p:stCondLst>
+                      <p:childTnLst>
+                        <p:par>
+                          <p:cTn id="4" fill="hold">
+                            <p:stCondLst>
+                              <p:cond delay="0"/>
+                            </p:stCondLst>
+                            <p:childTnLst>
+                              <p:par>
+                                <p:cTn id="5" presetID="1" presetClass="mediacall" presetSubtype="0" fill="hold" nodeType="clickEffect">
+                                  <p:stCondLst>
+                                    <p:cond delay="0"/>
+                                  </p:stCondLst>
+                                  <p:childTnLst>
+                                    <p:cmd type="call" cmd="playFrom(0.0)">
+                                      <p:cBhvr>
+                                        <p:cTn id="6" dur="1" fill="hold"/>
+                                        <p:tgtEl>
+                                          <p:spTgt spid="3"/>
+                                        </p:tgtEl>
+                                      </p:cBhvr>
+                                    </p:cmd>
+                                  </p:childTnLst>
+                                </p:cTn>
+                              </p:par>
+                            </p:childTnLst>
+                          </p:cTn>
+                        </p:par>
+                      </p:childTnLst>
+                    </p:cTn>
+                  </p:par>
+                </p:childTnLst>
+              </p:cTn>
+              <p:prevCondLst>
+                <p:cond evt="onPrev" delay="0">
+                  <p:tgtEl>
+                    <p:sldTgt/>
+                  </p:tgtEl>
+                </p:cond>
+              </p:prevCondLst>
+              <p:nextCondLst>
+                <p:cond evt="onNext" delay="0">
+                  <p:tgtEl>
+                    <p:sldTgt/>
+                  </p:tgtEl>
+                </p:cond>
+              </p:nextCondLst>
+            </p:seq>
+            <p:video>
+              <p:cMediaNode vol="80000">
+                <p:cTn id="7" fill="hold" display="0">
+                  <p:stCondLst>
+                    <p:cond delay="indefinite"/>
+                  </p:stCondLst>
+                </p:cTn>
+                <p:tgtEl>
+                  <p:spTgt spid="3"/>
+                </p:tgtEl>
+              </p:cMediaNode>
+            </p:video>
+            <p:seq concurrent="1" nextAc="seek">
+              <p:cTn id="8" restart="whenNotActive" fill="hold" evtFilter="cancelBubble" nodeType="interactiveSeq">
+                <p:stCondLst>
+                  <p:cond evt="onClick" delay="0">
+                    <p:tgtEl>
+                      <p:spTgt spid="3"/>
+                    </p:tgtEl>
+                  </p:cond>
+                </p:stCondLst>
+                <p:endSync evt="end" delay="0">
+                  <p:rtn val="all"/>
+                </p:endSync>
+                <p:childTnLst>
+                  <p:par>
+                    <p:cTn id="9" fill="hold">
+                      <p:stCondLst>
+                        <p:cond delay="0"/>
+                      </p:stCondLst>
+                      <p:childTnLst>
+                        <p:par>
+                          <p:cTn id="10" fill="hold">
+                            <p:stCondLst>
+                              <p:cond delay="0"/>
+                            </p:stCondLst>
+                            <p:childTnLst>
+                              <p:par>
+                                <p:cTn id="11" presetID="2" presetClass="mediacall" presetSubtype="0" fill="hold" nodeType="clickEffect">
+                                  <p:stCondLst>
+                                    <p:cond delay="0"/>
+                                  </p:stCondLst>
+                                  <p:childTnLst>
+                                    <p:cmd type="call" cmd="togglePause">
+                                      <p:cBhvr>
+                                        <p:cTn id="12" dur="1" fill="hold"/>
+                                        <p:tgtEl>
+                                          <p:spTgt spid="3"/>
+                                        </p:tgtEl>
+                                      </p:cBhvr>
+                                    </p:cmd>
+                                  </p:childTnLst>
+                                </p:cTn>
+                              </p:par>
+                            </p:childTnLst>
+                          </p:cTn>
+                        </p:par>
+                      </p:childTnLst>
+                    </p:cTn>
+                  </p:par>
+                </p:childTnLst>
+              </p:cTn>
+              <p:nextCondLst>
+                <p:cond evt="onClick" delay="0">
+                  <p:tgtEl>
+                    <p:spTgt spid="3"/>
+                  </p:tgtEl>
+                </p:cond>
+              </p:nextCondLst>
+            </p:seq>
+          </p:childTnLst>
+        </p:cTn>
+      </p:par>
+    </p:tnLst>
+  </p:timing>
+</p:sld>
+</file>
+
+<file path=ppt/slides/slide13.xml><?xml version="1.0" encoding="utf-8"?>
+<p:sld xmlns:a="http://schemas.openxmlformats.org/drawingml/2006/main" xmlns:r="http://schemas.openxmlformats.org/officeDocument/2006/relationships" xmlns:p="http://schemas.openxmlformats.org/presentationml/2006/main">
+  <p:cSld>
+    <p:spTree>
+      <p:nvGrpSpPr>
+        <p:cNvPr id="1" name=""/>
+        <p:cNvGrpSpPr/>
+        <p:nvPr/>
+      </p:nvGrpSpPr>
+      <p:grpSpPr>
+        <a:xfrm>
+          <a:off x="0" y="0"/>
+          <a:ext cx="0" cy="0"/>
+          <a:chOff x="0" y="0"/>
+          <a:chExt cx="0" cy="0"/>
+        </a:xfrm>
+      </p:grpSpPr>
+      <p:sp>
+        <p:nvSpPr>
+          <p:cNvPr id="3" name="TextBox 2">
+            <a:extLst>
+              <a:ext uri="{FF2B5EF4-FFF2-40B4-BE49-F238E27FC236}">
+                <a16:creationId xmlns:a16="http://schemas.microsoft.com/office/drawing/2014/main" id="{3338DFEC-C617-1E86-A27A-A77D4AC20EE2}"/>
+              </a:ext>
+            </a:extLst>
+          </p:cNvPr>
+          <p:cNvSpPr txBox="1"/>
+          <p:nvPr/>
+        </p:nvSpPr>
+        <p:spPr>
+          <a:xfrm>
+            <a:off x="223935" y="251927"/>
+            <a:ext cx="11737910" cy="3862596"/>
+          </a:xfrm>
+          <a:prstGeom prst="rect">
+            <a:avLst/>
+          </a:prstGeom>
+          <a:noFill/>
+        </p:spPr>
+        <p:txBody>
+          <a:bodyPr wrap="square" rtlCol="0">
+            <a:spAutoFit/>
+          </a:bodyPr>
+          <a:lstStyle/>
+          <a:p>
+            <a:r>
+              <a:rPr lang="en-US" dirty="0"/>
+              <a:t>							                     </a:t>
+            </a:r>
+            <a:r>
+              <a:rPr lang="en-US" sz="2500" u="sng" dirty="0"/>
+              <a:t>Conclusion</a:t>
+            </a:r>
+          </a:p>
+          <a:p>
+            <a:endParaRPr lang="en-US" sz="2200" u="sng" dirty="0"/>
+          </a:p>
+          <a:p>
+            <a:endParaRPr lang="en-US" sz="2200" dirty="0"/>
+          </a:p>
+          <a:p>
+            <a:pPr marL="342900" indent="-342900">
+              <a:buFont typeface="Arial" panose="020B0604020202020204" pitchFamily="34" charset="0"/>
+              <a:buChar char="•"/>
+            </a:pPr>
+            <a:r>
+              <a:rPr lang="en-US" sz="2200" dirty="0"/>
+              <a:t>Learned about</a:t>
+            </a:r>
+          </a:p>
+          <a:p>
+            <a:pPr marL="800100" lvl="1" indent="-342900">
+              <a:buFont typeface="Arial" panose="020B0604020202020204" pitchFamily="34" charset="0"/>
+              <a:buChar char="•"/>
+            </a:pPr>
+            <a:r>
+              <a:rPr lang="en-US" sz="2200" dirty="0"/>
+              <a:t>WBS,GANTT, SWOT, RISK Chart</a:t>
+            </a:r>
+          </a:p>
+          <a:p>
+            <a:pPr marL="800100" lvl="1" indent="-342900">
+              <a:buFont typeface="Arial" panose="020B0604020202020204" pitchFamily="34" charset="0"/>
+              <a:buChar char="•"/>
+            </a:pPr>
+            <a:r>
+              <a:rPr lang="en-US" sz="2200" dirty="0"/>
+              <a:t>Tools for Video Editing and Chart making </a:t>
+            </a:r>
+          </a:p>
+          <a:p>
+            <a:pPr marL="342900" indent="-342900">
+              <a:buFont typeface="Arial" panose="020B0604020202020204" pitchFamily="34" charset="0"/>
+              <a:buChar char="•"/>
+            </a:pPr>
+            <a:r>
+              <a:rPr lang="en-US" sz="2200" dirty="0"/>
+              <a:t>Helped to speak Infront of Camera</a:t>
+            </a:r>
+          </a:p>
+          <a:p>
+            <a:pPr marL="342900" indent="-342900">
+              <a:buFont typeface="Arial" panose="020B0604020202020204" pitchFamily="34" charset="0"/>
+              <a:buChar char="•"/>
+            </a:pPr>
+            <a:r>
+              <a:rPr lang="en-US" sz="2200" dirty="0"/>
+              <a:t>Assessment will help for Interviews</a:t>
+            </a:r>
+          </a:p>
+          <a:p>
+            <a:pPr marL="342900" indent="-342900">
+              <a:buFont typeface="Arial" panose="020B0604020202020204" pitchFamily="34" charset="0"/>
+              <a:buChar char="•"/>
+            </a:pPr>
+            <a:endParaRPr lang="en-US" sz="2200" dirty="0"/>
+          </a:p>
+          <a:p>
+            <a:pPr marL="342900" indent="-342900">
+              <a:buFont typeface="Arial" panose="020B0604020202020204" pitchFamily="34" charset="0"/>
+              <a:buChar char="•"/>
+            </a:pPr>
+            <a:endParaRPr lang="en-US" sz="2200" dirty="0"/>
+          </a:p>
+          <a:p>
+            <a:pPr marL="342900" indent="-342900">
+              <a:buFont typeface="Arial" panose="020B0604020202020204" pitchFamily="34" charset="0"/>
+              <a:buChar char="•"/>
+            </a:pPr>
+            <a:endParaRPr lang="en-US" sz="2200" u="sng" dirty="0"/>
+          </a:p>
+        </p:txBody>
+      </p:sp>
+    </p:spTree>
+    <p:extLst>
+      <p:ext uri="{BB962C8B-B14F-4D97-AF65-F5344CB8AC3E}">
+        <p14:creationId xmlns:p14="http://schemas.microsoft.com/office/powerpoint/2010/main" val="3357108174"/>
+      </p:ext>
+    </p:extLst>
+  </p:cSld>
+  <p:clrMapOvr>
+    <a:masterClrMapping/>
+  </p:clrMapOvr>
+  <p:transition spd="slow">
+    <p:push dir="u"/>
+  </p:transition>
+</p:sld>
+</file>
+
+<file path=ppt/slides/slide14.xml><?xml version="1.0" encoding="utf-8"?>
+<p:sld xmlns:a="http://schemas.openxmlformats.org/drawingml/2006/main" xmlns:r="http://schemas.openxmlformats.org/officeDocument/2006/relationships" xmlns:p="http://schemas.openxmlformats.org/presentationml/2006/main">
+  <p:cSld>
+    <p:spTree>
+      <p:nvGrpSpPr>
+        <p:cNvPr id="1" name=""/>
+        <p:cNvGrpSpPr/>
+        <p:nvPr/>
+      </p:nvGrpSpPr>
+      <p:grpSpPr>
+        <a:xfrm>
+          <a:off x="0" y="0"/>
+          <a:ext cx="0" cy="0"/>
+          <a:chOff x="0" y="0"/>
+          <a:chExt cx="0" cy="0"/>
+        </a:xfrm>
+      </p:grpSpPr>
+      <p:sp>
+        <p:nvSpPr>
+          <p:cNvPr id="2" name="TextBox 1">
+            <a:extLst>
+              <a:ext uri="{FF2B5EF4-FFF2-40B4-BE49-F238E27FC236}">
+                <a16:creationId xmlns:a16="http://schemas.microsoft.com/office/drawing/2014/main" id="{E63E5E57-C321-A8EA-7969-A5BE77E95CB3}"/>
+              </a:ext>
+            </a:extLst>
+          </p:cNvPr>
+          <p:cNvSpPr txBox="1"/>
+          <p:nvPr/>
+        </p:nvSpPr>
+        <p:spPr>
+          <a:xfrm>
+            <a:off x="3163077" y="2105561"/>
+            <a:ext cx="6223519" cy="1323439"/>
+          </a:xfrm>
+          <a:prstGeom prst="rect">
+            <a:avLst/>
+          </a:prstGeom>
+          <a:noFill/>
+        </p:spPr>
+        <p:txBody>
+          <a:bodyPr wrap="square" rtlCol="0">
+            <a:spAutoFit/>
+          </a:bodyPr>
+          <a:lstStyle/>
+          <a:p>
+            <a:r>
+              <a:rPr lang="en-US" sz="8000" b="1" dirty="0">
+                <a:solidFill>
+                  <a:srgbClr val="FF0000"/>
+                </a:solidFill>
+              </a:rPr>
+              <a:t>Thank You</a:t>
+            </a:r>
+          </a:p>
+        </p:txBody>
+      </p:sp>
+    </p:spTree>
+    <p:extLst>
+      <p:ext uri="{BB962C8B-B14F-4D97-AF65-F5344CB8AC3E}">
+        <p14:creationId xmlns:p14="http://schemas.microsoft.com/office/powerpoint/2010/main" val="1382152045"/>
+      </p:ext>
+    </p:extLst>
+  </p:cSld>
+  <p:clrMapOvr>
+    <a:masterClrMapping/>
+  </p:clrMapOvr>
+  <p:transition spd="slow">
+    <p:push dir="u"/>
+  </p:transition>
+</p:sld>
+</file>
+
 <file path=ppt/slides/slide2.xml><?xml version="1.0" encoding="utf-8"?>
 <p:sld xmlns:a="http://schemas.openxmlformats.org/drawingml/2006/main" xmlns:r="http://schemas.openxmlformats.org/officeDocument/2006/relationships" xmlns:p="http://schemas.openxmlformats.org/presentationml/2006/main">
   <p:cSld>
@@ -7749,7 +9641,7 @@
         <p:spPr>
           <a:xfrm>
             <a:off x="634482" y="214605"/>
-            <a:ext cx="11308702" cy="3493264"/>
+            <a:ext cx="11308702" cy="3862596"/>
           </a:xfrm>
           <a:prstGeom prst="rect">
             <a:avLst/>
@@ -7775,16 +9667,13 @@
             <a:endParaRPr lang="en-US" sz="2200" u="sng" dirty="0"/>
           </a:p>
           <a:p>
-            <a:endParaRPr lang="en-US" sz="2000" u="sng" dirty="0"/>
-          </a:p>
-          <a:p>
             <a:pPr marL="342900" indent="-342900">
               <a:buFont typeface="Arial" panose="020B0604020202020204" pitchFamily="34" charset="0"/>
               <a:buChar char="•"/>
             </a:pPr>
             <a:r>
               <a:rPr lang="en-US" sz="2200" dirty="0"/>
-              <a:t>Video Resume Presentation</a:t>
+              <a:t>AIM</a:t>
             </a:r>
           </a:p>
           <a:p>
@@ -7804,7 +9693,7 @@
             </a:pPr>
             <a:r>
               <a:rPr lang="en-US" sz="2200" dirty="0"/>
-              <a:t>SWOT</a:t>
+              <a:t>WBS</a:t>
             </a:r>
           </a:p>
           <a:p>
@@ -7814,7 +9703,7 @@
             </a:pPr>
             <a:r>
               <a:rPr lang="en-US" sz="2200" dirty="0"/>
-              <a:t>RISK</a:t>
+              <a:t>GANTT</a:t>
             </a:r>
           </a:p>
           <a:p>
@@ -7824,7 +9713,7 @@
             </a:pPr>
             <a:r>
               <a:rPr lang="en-US" sz="2200" dirty="0"/>
-              <a:t>WBS</a:t>
+              <a:t>SWOT</a:t>
             </a:r>
           </a:p>
           <a:p>
@@ -7834,7 +9723,7 @@
             </a:pPr>
             <a:r>
               <a:rPr lang="en-US" sz="2200" dirty="0"/>
-              <a:t>GANTT</a:t>
+              <a:t>RISK</a:t>
             </a:r>
           </a:p>
           <a:p>
@@ -7844,8 +9733,25 @@
             </a:pPr>
             <a:r>
               <a:rPr lang="en-US" sz="2200" dirty="0"/>
+              <a:t>Video Presentation</a:t>
+            </a:r>
+          </a:p>
+          <a:p>
+            <a:pPr marL="342900" indent="-342900">
+              <a:buFont typeface="Arial" panose="020B0604020202020204" pitchFamily="34" charset="0"/>
+              <a:buChar char="•"/>
+            </a:pPr>
+            <a:r>
+              <a:rPr lang="en-US" sz="2200" dirty="0"/>
               <a:t>Conclusion</a:t>
             </a:r>
+          </a:p>
+          <a:p>
+            <a:pPr marL="342900" indent="-342900">
+              <a:buFont typeface="Arial" panose="020B0604020202020204" pitchFamily="34" charset="0"/>
+              <a:buChar char="•"/>
+            </a:pPr>
+            <a:endParaRPr lang="en-US" sz="2200" dirty="0"/>
           </a:p>
         </p:txBody>
       </p:sp>
@@ -7866,6 +9772,329 @@
 </file>
 
 <file path=ppt/slides/slide3.xml><?xml version="1.0" encoding="utf-8"?>
+<p:sld xmlns:a="http://schemas.openxmlformats.org/drawingml/2006/main" xmlns:r="http://schemas.openxmlformats.org/officeDocument/2006/relationships" xmlns:p="http://schemas.openxmlformats.org/presentationml/2006/main">
+  <p:cSld>
+    <p:spTree>
+      <p:nvGrpSpPr>
+        <p:cNvPr id="1" name=""/>
+        <p:cNvGrpSpPr/>
+        <p:nvPr/>
+      </p:nvGrpSpPr>
+      <p:grpSpPr>
+        <a:xfrm>
+          <a:off x="0" y="0"/>
+          <a:ext cx="0" cy="0"/>
+          <a:chOff x="0" y="0"/>
+          <a:chExt cx="0" cy="0"/>
+        </a:xfrm>
+      </p:grpSpPr>
+      <p:sp>
+        <p:nvSpPr>
+          <p:cNvPr id="2" name="TextBox 1">
+            <a:extLst>
+              <a:ext uri="{FF2B5EF4-FFF2-40B4-BE49-F238E27FC236}">
+                <a16:creationId xmlns:a16="http://schemas.microsoft.com/office/drawing/2014/main" id="{40105CC4-6B1A-25A4-ED36-D529090262B5}"/>
+              </a:ext>
+            </a:extLst>
+          </p:cNvPr>
+          <p:cNvSpPr txBox="1"/>
+          <p:nvPr/>
+        </p:nvSpPr>
+        <p:spPr>
+          <a:xfrm>
+            <a:off x="270588" y="2146040"/>
+            <a:ext cx="11383347" cy="923330"/>
+          </a:xfrm>
+          <a:prstGeom prst="rect">
+            <a:avLst/>
+          </a:prstGeom>
+          <a:noFill/>
+        </p:spPr>
+        <p:txBody>
+          <a:bodyPr wrap="square" rtlCol="0">
+            <a:spAutoFit/>
+          </a:bodyPr>
+          <a:lstStyle/>
+          <a:p>
+            <a:r>
+              <a:rPr lang="en-US" dirty="0"/>
+              <a:t>                                                                           </a:t>
+            </a:r>
+            <a:r>
+              <a:rPr lang="en-US" sz="5400" b="1" dirty="0"/>
+              <a:t>AIM</a:t>
+            </a:r>
+          </a:p>
+        </p:txBody>
+      </p:sp>
+    </p:spTree>
+    <p:extLst>
+      <p:ext uri="{BB962C8B-B14F-4D97-AF65-F5344CB8AC3E}">
+        <p14:creationId xmlns:p14="http://schemas.microsoft.com/office/powerpoint/2010/main" val="1850874543"/>
+      </p:ext>
+    </p:extLst>
+  </p:cSld>
+  <p:clrMapOvr>
+    <a:masterClrMapping/>
+  </p:clrMapOvr>
+  <p:transition spd="slow">
+    <p:push dir="u"/>
+  </p:transition>
+</p:sld>
+</file>
+
+<file path=ppt/slides/slide4.xml><?xml version="1.0" encoding="utf-8"?>
+<p:sld xmlns:a="http://schemas.openxmlformats.org/drawingml/2006/main" xmlns:r="http://schemas.openxmlformats.org/officeDocument/2006/relationships" xmlns:p="http://schemas.openxmlformats.org/presentationml/2006/main">
+  <p:cSld>
+    <p:spTree>
+      <p:nvGrpSpPr>
+        <p:cNvPr id="1" name=""/>
+        <p:cNvGrpSpPr/>
+        <p:nvPr/>
+      </p:nvGrpSpPr>
+      <p:grpSpPr>
+        <a:xfrm>
+          <a:off x="0" y="0"/>
+          <a:ext cx="0" cy="0"/>
+          <a:chOff x="0" y="0"/>
+          <a:chExt cx="0" cy="0"/>
+        </a:xfrm>
+      </p:grpSpPr>
+      <p:sp>
+        <p:nvSpPr>
+          <p:cNvPr id="2" name="TextBox 1">
+            <a:extLst>
+              <a:ext uri="{FF2B5EF4-FFF2-40B4-BE49-F238E27FC236}">
+                <a16:creationId xmlns:a16="http://schemas.microsoft.com/office/drawing/2014/main" id="{8F13F0C9-1073-EF18-B269-DDACB11AA1EC}"/>
+              </a:ext>
+            </a:extLst>
+          </p:cNvPr>
+          <p:cNvSpPr txBox="1"/>
+          <p:nvPr/>
+        </p:nvSpPr>
+        <p:spPr>
+          <a:xfrm>
+            <a:off x="0" y="391885"/>
+            <a:ext cx="12192000" cy="5386090"/>
+          </a:xfrm>
+          <a:prstGeom prst="rect">
+            <a:avLst/>
+          </a:prstGeom>
+          <a:noFill/>
+        </p:spPr>
+        <p:txBody>
+          <a:bodyPr wrap="square" rtlCol="0">
+            <a:spAutoFit/>
+          </a:bodyPr>
+          <a:lstStyle/>
+          <a:p>
+            <a:r>
+              <a:rPr lang="en-US" sz="5400" b="1" dirty="0"/>
+              <a:t>  WBS (Work Breakdown Structure) </a:t>
+            </a:r>
+          </a:p>
+          <a:p>
+            <a:r>
+              <a:rPr lang="en-US" sz="5400" b="1" dirty="0"/>
+              <a:t>                            &amp;</a:t>
+            </a:r>
+          </a:p>
+          <a:p>
+            <a:r>
+              <a:rPr lang="en-US" sz="5400" b="1" dirty="0"/>
+              <a:t>                 GANTT CHART</a:t>
+            </a:r>
+          </a:p>
+          <a:p>
+            <a:endParaRPr lang="en-US" sz="5400" b="1" dirty="0"/>
+          </a:p>
+          <a:p>
+            <a:endParaRPr lang="en-US" sz="1600" b="1" dirty="0"/>
+          </a:p>
+          <a:p>
+            <a:endParaRPr lang="en-US" sz="1600" b="1" dirty="0"/>
+          </a:p>
+          <a:p>
+            <a:endParaRPr lang="en-US" sz="1600" b="1" dirty="0"/>
+          </a:p>
+          <a:p>
+            <a:endParaRPr lang="en-US" sz="1600" b="1" dirty="0"/>
+          </a:p>
+          <a:p>
+            <a:endParaRPr lang="en-US" sz="1600" b="1" dirty="0"/>
+          </a:p>
+          <a:p>
+            <a:endParaRPr lang="en-US" sz="1600" b="1" dirty="0"/>
+          </a:p>
+          <a:p>
+            <a:r>
+              <a:rPr lang="en-US" sz="1600" b="1" dirty="0"/>
+              <a:t>Online tool – digrams.net </a:t>
+            </a:r>
+          </a:p>
+          <a:p>
+            <a:r>
+              <a:rPr lang="en-US" sz="1600" b="1" dirty="0"/>
+              <a:t>                       app.teamgantt.com </a:t>
+            </a:r>
+          </a:p>
+        </p:txBody>
+      </p:sp>
+    </p:spTree>
+    <p:extLst>
+      <p:ext uri="{BB962C8B-B14F-4D97-AF65-F5344CB8AC3E}">
+        <p14:creationId xmlns:p14="http://schemas.microsoft.com/office/powerpoint/2010/main" val="3972694758"/>
+      </p:ext>
+    </p:extLst>
+  </p:cSld>
+  <p:clrMapOvr>
+    <a:masterClrMapping/>
+  </p:clrMapOvr>
+  <p:transition spd="slow">
+    <p:push dir="u"/>
+  </p:transition>
+</p:sld>
+</file>
+
+<file path=ppt/slides/slide5.xml><?xml version="1.0" encoding="utf-8"?>
+<p:sld xmlns:a="http://schemas.openxmlformats.org/drawingml/2006/main" xmlns:r="http://schemas.openxmlformats.org/officeDocument/2006/relationships" xmlns:p="http://schemas.openxmlformats.org/presentationml/2006/main">
+  <p:cSld>
+    <p:spTree>
+      <p:nvGrpSpPr>
+        <p:cNvPr id="1" name=""/>
+        <p:cNvGrpSpPr/>
+        <p:nvPr/>
+      </p:nvGrpSpPr>
+      <p:grpSpPr>
+        <a:xfrm>
+          <a:off x="0" y="0"/>
+          <a:ext cx="0" cy="0"/>
+          <a:chOff x="0" y="0"/>
+          <a:chExt cx="0" cy="0"/>
+        </a:xfrm>
+      </p:grpSpPr>
+      <p:pic>
+        <p:nvPicPr>
+          <p:cNvPr id="8" name="Picture 7">
+            <a:extLst>
+              <a:ext uri="{FF2B5EF4-FFF2-40B4-BE49-F238E27FC236}">
+                <a16:creationId xmlns:a16="http://schemas.microsoft.com/office/drawing/2014/main" id="{EDEE6E1A-5210-5FB9-133B-C8B923089331}"/>
+              </a:ext>
+            </a:extLst>
+          </p:cNvPr>
+          <p:cNvPicPr>
+            <a:picLocks noChangeAspect="1"/>
+          </p:cNvPicPr>
+          <p:nvPr/>
+        </p:nvPicPr>
+        <p:blipFill>
+          <a:blip r:embed="rId2">
+            <a:extLst>
+              <a:ext uri="{28A0092B-C50C-407E-A947-70E740481C1C}">
+                <a14:useLocalDpi xmlns:a14="http://schemas.microsoft.com/office/drawing/2010/main" val="0"/>
+              </a:ext>
+            </a:extLst>
+          </a:blip>
+          <a:stretch>
+            <a:fillRect/>
+          </a:stretch>
+        </p:blipFill>
+        <p:spPr>
+          <a:xfrm>
+            <a:off x="0" y="2693106"/>
+            <a:ext cx="12192000" cy="1471788"/>
+          </a:xfrm>
+          <a:prstGeom prst="rect">
+            <a:avLst/>
+          </a:prstGeom>
+        </p:spPr>
+      </p:pic>
+    </p:spTree>
+    <p:extLst>
+      <p:ext uri="{BB962C8B-B14F-4D97-AF65-F5344CB8AC3E}">
+        <p14:creationId xmlns:p14="http://schemas.microsoft.com/office/powerpoint/2010/main" val="3398675397"/>
+      </p:ext>
+    </p:extLst>
+  </p:cSld>
+  <p:clrMapOvr>
+    <a:masterClrMapping/>
+  </p:clrMapOvr>
+  <p:transition spd="slow">
+    <p:push dir="u"/>
+  </p:transition>
+</p:sld>
+</file>
+
+<file path=ppt/slides/slide6.xml><?xml version="1.0" encoding="utf-8"?>
+<p:sld xmlns:a="http://schemas.openxmlformats.org/drawingml/2006/main" xmlns:r="http://schemas.openxmlformats.org/officeDocument/2006/relationships" xmlns:p="http://schemas.openxmlformats.org/presentationml/2006/main">
+  <p:cSld>
+    <p:spTree>
+      <p:nvGrpSpPr>
+        <p:cNvPr id="1" name=""/>
+        <p:cNvGrpSpPr/>
+        <p:nvPr/>
+      </p:nvGrpSpPr>
+      <p:grpSpPr>
+        <a:xfrm>
+          <a:off x="0" y="0"/>
+          <a:ext cx="0" cy="0"/>
+          <a:chOff x="0" y="0"/>
+          <a:chExt cx="0" cy="0"/>
+        </a:xfrm>
+      </p:grpSpPr>
+      <p:pic>
+        <p:nvPicPr>
+          <p:cNvPr id="3" name="Picture 2">
+            <a:extLst>
+              <a:ext uri="{FF2B5EF4-FFF2-40B4-BE49-F238E27FC236}">
+                <a16:creationId xmlns:a16="http://schemas.microsoft.com/office/drawing/2014/main" id="{18703068-468E-BC81-F427-A8C60771FD9A}"/>
+              </a:ext>
+            </a:extLst>
+          </p:cNvPr>
+          <p:cNvPicPr>
+            <a:picLocks noChangeAspect="1"/>
+          </p:cNvPicPr>
+          <p:nvPr/>
+        </p:nvPicPr>
+        <p:blipFill>
+          <a:blip r:embed="rId2">
+            <a:extLst>
+              <a:ext uri="{28A0092B-C50C-407E-A947-70E740481C1C}">
+                <a14:useLocalDpi xmlns:a14="http://schemas.microsoft.com/office/drawing/2010/main" val="0"/>
+              </a:ext>
+            </a:extLst>
+          </a:blip>
+          <a:stretch>
+            <a:fillRect/>
+          </a:stretch>
+        </p:blipFill>
+        <p:spPr>
+          <a:xfrm>
+            <a:off x="2944870" y="0"/>
+            <a:ext cx="5997460" cy="6561389"/>
+          </a:xfrm>
+          <a:prstGeom prst="rect">
+            <a:avLst/>
+          </a:prstGeom>
+        </p:spPr>
+      </p:pic>
+    </p:spTree>
+    <p:extLst>
+      <p:ext uri="{BB962C8B-B14F-4D97-AF65-F5344CB8AC3E}">
+        <p14:creationId xmlns:p14="http://schemas.microsoft.com/office/powerpoint/2010/main" val="2401080507"/>
+      </p:ext>
+    </p:extLst>
+  </p:cSld>
+  <p:clrMapOvr>
+    <a:masterClrMapping/>
+  </p:clrMapOvr>
+  <p:transition spd="slow">
+    <p:push dir="u"/>
+  </p:transition>
+</p:sld>
+</file>
+
+<file path=ppt/slides/slide7.xml><?xml version="1.0" encoding="utf-8"?>
 <p:sld xmlns:a="http://schemas.openxmlformats.org/drawingml/2006/main" xmlns:r="http://schemas.openxmlformats.org/officeDocument/2006/relationships" xmlns:p="http://schemas.openxmlformats.org/presentationml/2006/main">
   <p:cSld>
     <p:spTree>
@@ -9377,168 +11606,7 @@
 </p:sld>
 </file>
 
-<file path=ppt/slides/slide4.xml><?xml version="1.0" encoding="utf-8"?>
-<p:sld xmlns:a="http://schemas.openxmlformats.org/drawingml/2006/main" xmlns:r="http://schemas.openxmlformats.org/officeDocument/2006/relationships" xmlns:p="http://schemas.openxmlformats.org/presentationml/2006/main">
-  <p:cSld>
-    <p:spTree>
-      <p:nvGrpSpPr>
-        <p:cNvPr id="1" name=""/>
-        <p:cNvGrpSpPr/>
-        <p:nvPr/>
-      </p:nvGrpSpPr>
-      <p:grpSpPr>
-        <a:xfrm>
-          <a:off x="0" y="0"/>
-          <a:ext cx="0" cy="0"/>
-          <a:chOff x="0" y="0"/>
-          <a:chExt cx="0" cy="0"/>
-        </a:xfrm>
-      </p:grpSpPr>
-      <p:sp>
-        <p:nvSpPr>
-          <p:cNvPr id="2" name="TextBox 1">
-            <a:extLst>
-              <a:ext uri="{FF2B5EF4-FFF2-40B4-BE49-F238E27FC236}">
-                <a16:creationId xmlns:a16="http://schemas.microsoft.com/office/drawing/2014/main" id="{371289E5-BEBC-1C12-2F1C-FB0588235742}"/>
-              </a:ext>
-            </a:extLst>
-          </p:cNvPr>
-          <p:cNvSpPr txBox="1"/>
-          <p:nvPr/>
-        </p:nvSpPr>
-        <p:spPr>
-          <a:xfrm>
-            <a:off x="307910" y="270588"/>
-            <a:ext cx="11709919" cy="1569660"/>
-          </a:xfrm>
-          <a:prstGeom prst="rect">
-            <a:avLst/>
-          </a:prstGeom>
-          <a:noFill/>
-        </p:spPr>
-        <p:txBody>
-          <a:bodyPr wrap="square" rtlCol="0">
-            <a:spAutoFit/>
-          </a:bodyPr>
-          <a:lstStyle/>
-          <a:p>
-            <a:r>
-              <a:rPr lang="en-US" sz="3200" dirty="0"/>
-              <a:t>                             </a:t>
-            </a:r>
-            <a:r>
-              <a:rPr lang="en-US" sz="3200" u="sng" dirty="0"/>
-              <a:t>VIDEO PRESENTATION</a:t>
-            </a:r>
-          </a:p>
-          <a:p>
-            <a:endParaRPr lang="en-US" sz="3200" u="sng" dirty="0"/>
-          </a:p>
-          <a:p>
-            <a:pPr marL="457200" indent="-457200">
-              <a:buFont typeface="Arial" panose="020B0604020202020204" pitchFamily="34" charset="0"/>
-              <a:buChar char="•"/>
-            </a:pPr>
-            <a:endParaRPr lang="en-US" sz="3200" u="sng" dirty="0"/>
-          </a:p>
-        </p:txBody>
-      </p:sp>
-      <p:pic>
-        <p:nvPicPr>
-          <p:cNvPr id="4" name="Picture 3">
-            <a:extLst>
-              <a:ext uri="{FF2B5EF4-FFF2-40B4-BE49-F238E27FC236}">
-                <a16:creationId xmlns:a16="http://schemas.microsoft.com/office/drawing/2014/main" id="{B71C9FFE-CAF7-3699-F012-E4E075831E0B}"/>
-              </a:ext>
-            </a:extLst>
-          </p:cNvPr>
-          <p:cNvPicPr>
-            <a:picLocks noChangeAspect="1"/>
-          </p:cNvPicPr>
-          <p:nvPr/>
-        </p:nvPicPr>
-        <p:blipFill>
-          <a:blip r:embed="rId2">
-            <a:extLst>
-              <a:ext uri="{28A0092B-C50C-407E-A947-70E740481C1C}">
-                <a14:useLocalDpi xmlns:a14="http://schemas.microsoft.com/office/drawing/2010/main" val="0"/>
-              </a:ext>
-            </a:extLst>
-          </a:blip>
-          <a:stretch>
-            <a:fillRect/>
-          </a:stretch>
-        </p:blipFill>
-        <p:spPr>
-          <a:xfrm>
-            <a:off x="3144416" y="1381989"/>
-            <a:ext cx="5187821" cy="2742520"/>
-          </a:xfrm>
-          <a:prstGeom prst="rect">
-            <a:avLst/>
-          </a:prstGeom>
-        </p:spPr>
-      </p:pic>
-      <p:sp>
-        <p:nvSpPr>
-          <p:cNvPr id="5" name="TextBox 4">
-            <a:extLst>
-              <a:ext uri="{FF2B5EF4-FFF2-40B4-BE49-F238E27FC236}">
-                <a16:creationId xmlns:a16="http://schemas.microsoft.com/office/drawing/2014/main" id="{00B8AA77-A0D2-95CA-0BE9-B868F0E5ED06}"/>
-              </a:ext>
-            </a:extLst>
-          </p:cNvPr>
-          <p:cNvSpPr txBox="1"/>
-          <p:nvPr/>
-        </p:nvSpPr>
-        <p:spPr>
-          <a:xfrm>
-            <a:off x="2677886" y="4470800"/>
-            <a:ext cx="7203233" cy="369332"/>
-          </a:xfrm>
-          <a:prstGeom prst="rect">
-            <a:avLst/>
-          </a:prstGeom>
-          <a:noFill/>
-        </p:spPr>
-        <p:txBody>
-          <a:bodyPr wrap="square" rtlCol="0">
-            <a:spAutoFit/>
-          </a:bodyPr>
-          <a:lstStyle/>
-          <a:p>
-            <a:r>
-              <a:rPr lang="en-US" dirty="0"/>
-              <a:t>Source Link- </a:t>
-            </a:r>
-            <a:r>
-              <a:rPr lang="en-US" u="sng" dirty="0">
-                <a:solidFill>
-                  <a:srgbClr val="00B0F0"/>
-                </a:solidFill>
-              </a:rPr>
-              <a:t>https://www.youtube.com/watch?v=Ch_Kd0kVNNc</a:t>
-            </a:r>
-          </a:p>
-        </p:txBody>
-      </p:sp>
-    </p:spTree>
-    <p:extLst>
-      <p:ext uri="{BB962C8B-B14F-4D97-AF65-F5344CB8AC3E}">
-        <p14:creationId xmlns:p14="http://schemas.microsoft.com/office/powerpoint/2010/main" val="3631153188"/>
-      </p:ext>
-    </p:extLst>
-  </p:cSld>
-  <p:clrMapOvr>
-    <a:masterClrMapping/>
-  </p:clrMapOvr>
-  <p:transition spd="slow">
-    <p:push dir="u"/>
-  </p:transition>
-</p:sld>
-</file>
-
-<file path=ppt/slides/slide5.xml><?xml version="1.0" encoding="utf-8"?>
+<file path=ppt/slides/slide8.xml><?xml version="1.0" encoding="utf-8"?>
 <p:sld xmlns:a="http://schemas.openxmlformats.org/drawingml/2006/main" xmlns:r="http://schemas.openxmlformats.org/officeDocument/2006/relationships" xmlns:p="http://schemas.openxmlformats.org/presentationml/2006/main">
   <p:cSld>
     <p:spTree>
@@ -9611,7 +11679,7 @@
 </p:sld>
 </file>
 
-<file path=ppt/slides/slide6.xml><?xml version="1.0" encoding="utf-8"?>
+<file path=ppt/slides/slide9.xml><?xml version="1.0" encoding="utf-8"?>
 <p:sld xmlns:a="http://schemas.openxmlformats.org/drawingml/2006/main" xmlns:r="http://schemas.openxmlformats.org/officeDocument/2006/relationships" xmlns:p="http://schemas.openxmlformats.org/presentationml/2006/main">
   <p:cSld>
     <p:spTree>
@@ -9699,7 +11767,7 @@
           <p:nvPr>
             <p:extLst>
               <p:ext uri="{D42A27DB-BD31-4B8C-83A1-F6EECF244321}">
-                <p14:modId xmlns:p14="http://schemas.microsoft.com/office/powerpoint/2010/main" val="4108312347"/>
+                <p14:modId xmlns:p14="http://schemas.microsoft.com/office/powerpoint/2010/main" val="3899011428"/>
               </p:ext>
             </p:extLst>
           </p:nvPr>
@@ -9729,7 +11797,7 @@
         <p:spPr>
           <a:xfrm>
             <a:off x="2059732" y="604012"/>
-            <a:ext cx="2491274" cy="1661993"/>
+            <a:ext cx="2491274" cy="2031325"/>
           </a:xfrm>
           <a:prstGeom prst="rect">
             <a:avLst/>
@@ -9875,8 +11943,21 @@
             </a:pPr>
             <a:r>
               <a:rPr lang="en-US" sz="1200" b="1" dirty="0"/>
+              <a:t>Script writing skills</a:t>
+            </a:r>
+          </a:p>
+          <a:p>
+            <a:pPr marL="285750" indent="-285750">
+              <a:buFont typeface="Arial" panose="020B0604020202020204" pitchFamily="34" charset="0"/>
+              <a:buChar char="•"/>
+            </a:pPr>
+            <a:r>
+              <a:rPr lang="en-US" sz="1200" b="1" dirty="0"/>
               <a:t>Chart Preparation skill</a:t>
             </a:r>
+          </a:p>
+          <a:p>
+            <a:endParaRPr lang="en-US" sz="1200" b="1" dirty="0"/>
           </a:p>
           <a:p>
             <a:pPr marL="285750" indent="-285750">
@@ -10275,7 +12356,7 @@
         <p:spPr>
           <a:xfrm>
             <a:off x="7546910" y="3881635"/>
-            <a:ext cx="2543758" cy="2108269"/>
+            <a:ext cx="2543758" cy="2477601"/>
           </a:xfrm>
           <a:prstGeom prst="rect">
             <a:avLst/>
@@ -10429,6 +12510,16 @@
               <a:buFont typeface="Arial" panose="020B0604020202020204" pitchFamily="34" charset="0"/>
               <a:buChar char="•"/>
             </a:pPr>
+            <a:r>
+              <a:rPr lang="en-US" sz="1200" b="1" dirty="0"/>
+              <a:t>Platform  not working on Presentation Day</a:t>
+            </a:r>
+          </a:p>
+          <a:p>
+            <a:pPr marL="285750" indent="-285750">
+              <a:buFont typeface="Arial" panose="020B0604020202020204" pitchFamily="34" charset="0"/>
+              <a:buChar char="•"/>
+            </a:pPr>
             <a:endParaRPr lang="en-US" sz="1200" b="1" dirty="0"/>
           </a:p>
           <a:p>
@@ -10451,1501 +12542,6 @@
     <p:extLst>
       <p:ext uri="{BB962C8B-B14F-4D97-AF65-F5344CB8AC3E}">
         <p14:creationId xmlns:p14="http://schemas.microsoft.com/office/powerpoint/2010/main" val="4181998896"/>
-      </p:ext>
-    </p:extLst>
-  </p:cSld>
-  <p:clrMapOvr>
-    <a:masterClrMapping/>
-  </p:clrMapOvr>
-  <p:transition spd="slow">
-    <p:push dir="u"/>
-  </p:transition>
-</p:sld>
-</file>
-
-<file path=ppt/slides/slide7.xml><?xml version="1.0" encoding="utf-8"?>
-<p:sld xmlns:a="http://schemas.openxmlformats.org/drawingml/2006/main" xmlns:r="http://schemas.openxmlformats.org/officeDocument/2006/relationships" xmlns:p="http://schemas.openxmlformats.org/presentationml/2006/main">
-  <p:cSld>
-    <p:spTree>
-      <p:nvGrpSpPr>
-        <p:cNvPr id="1" name=""/>
-        <p:cNvGrpSpPr/>
-        <p:nvPr/>
-      </p:nvGrpSpPr>
-      <p:grpSpPr>
-        <a:xfrm>
-          <a:off x="0" y="0"/>
-          <a:ext cx="0" cy="0"/>
-          <a:chOff x="0" y="0"/>
-          <a:chExt cx="0" cy="0"/>
-        </a:xfrm>
-      </p:grpSpPr>
-      <p:sp>
-        <p:nvSpPr>
-          <p:cNvPr id="2" name="Title 1">
-            <a:extLst>
-              <a:ext uri="{FF2B5EF4-FFF2-40B4-BE49-F238E27FC236}">
-                <a16:creationId xmlns:a16="http://schemas.microsoft.com/office/drawing/2014/main" id="{ADF2B7CD-37D8-0C01-16F6-7F4816FB1AB5}"/>
-              </a:ext>
-            </a:extLst>
-          </p:cNvPr>
-          <p:cNvSpPr>
-            <a:spLocks noGrp="1"/>
-          </p:cNvSpPr>
-          <p:nvPr>
-            <p:ph type="title"/>
-          </p:nvPr>
-        </p:nvSpPr>
-        <p:spPr>
-          <a:xfrm>
-            <a:off x="838200" y="-79322"/>
-            <a:ext cx="10515600" cy="474630"/>
-          </a:xfrm>
-        </p:spPr>
-        <p:txBody>
-          <a:bodyPr>
-            <a:normAutofit fontScale="90000"/>
-          </a:bodyPr>
-          <a:lstStyle/>
-          <a:p>
-            <a:r>
-              <a:rPr lang="en-US" dirty="0"/>
-              <a:t>                                   </a:t>
-            </a:r>
-            <a:r>
-              <a:rPr lang="en-US" sz="2200" u="sng" dirty="0"/>
-              <a:t>RISK ASSESEMENT MATRIX</a:t>
-            </a:r>
-          </a:p>
-        </p:txBody>
-      </p:sp>
-      <p:graphicFrame>
-        <p:nvGraphicFramePr>
-          <p:cNvPr id="12" name="Table 12">
-            <a:extLst>
-              <a:ext uri="{FF2B5EF4-FFF2-40B4-BE49-F238E27FC236}">
-                <a16:creationId xmlns:a16="http://schemas.microsoft.com/office/drawing/2014/main" id="{D00FA8B9-83E1-8E62-8C21-9A28A7679586}"/>
-              </a:ext>
-            </a:extLst>
-          </p:cNvPr>
-          <p:cNvGraphicFramePr>
-            <a:graphicFrameLocks noGrp="1"/>
-          </p:cNvGraphicFramePr>
-          <p:nvPr>
-            <p:extLst>
-              <p:ext uri="{D42A27DB-BD31-4B8C-83A1-F6EECF244321}">
-                <p14:modId xmlns:p14="http://schemas.microsoft.com/office/powerpoint/2010/main" val="969096164"/>
-              </p:ext>
-            </p:extLst>
-          </p:nvPr>
-        </p:nvGraphicFramePr>
-        <p:xfrm>
-          <a:off x="8239125" y="5514313"/>
-          <a:ext cx="3788030" cy="1222931"/>
-        </p:xfrm>
-        <a:graphic>
-          <a:graphicData uri="http://schemas.openxmlformats.org/drawingml/2006/table">
-            <a:tbl>
-              <a:tblPr firstRow="1" bandRow="1">
-                <a:tableStyleId>{5C22544A-7EE6-4342-B048-85BDC9FD1C3A}</a:tableStyleId>
-              </a:tblPr>
-              <a:tblGrid>
-                <a:gridCol w="752475">
-                  <a:extLst>
-                    <a:ext uri="{9D8B030D-6E8A-4147-A177-3AD203B41FA5}">
-                      <a16:colId xmlns:a16="http://schemas.microsoft.com/office/drawing/2014/main" val="3503471953"/>
-                    </a:ext>
-                  </a:extLst>
-                </a:gridCol>
-                <a:gridCol w="883679">
-                  <a:extLst>
-                    <a:ext uri="{9D8B030D-6E8A-4147-A177-3AD203B41FA5}">
-                      <a16:colId xmlns:a16="http://schemas.microsoft.com/office/drawing/2014/main" val="3569684599"/>
-                    </a:ext>
-                  </a:extLst>
-                </a:gridCol>
-                <a:gridCol w="1097420">
-                  <a:extLst>
-                    <a:ext uri="{9D8B030D-6E8A-4147-A177-3AD203B41FA5}">
-                      <a16:colId xmlns:a16="http://schemas.microsoft.com/office/drawing/2014/main" val="1149344231"/>
-                    </a:ext>
-                  </a:extLst>
-                </a:gridCol>
-                <a:gridCol w="1054456">
-                  <a:extLst>
-                    <a:ext uri="{9D8B030D-6E8A-4147-A177-3AD203B41FA5}">
-                      <a16:colId xmlns:a16="http://schemas.microsoft.com/office/drawing/2014/main" val="1173549744"/>
-                    </a:ext>
-                  </a:extLst>
-                </a:gridCol>
-              </a:tblGrid>
-              <a:tr h="335050">
-                <a:tc>
-                  <a:txBody>
-                    <a:bodyPr/>
-                    <a:lstStyle/>
-                    <a:p>
-                      <a:endParaRPr lang="en-US" dirty="0"/>
-                    </a:p>
-                  </a:txBody>
-                  <a:tcPr>
-                    <a:solidFill>
-                      <a:schemeClr val="bg1"/>
-                    </a:solidFill>
-                  </a:tcPr>
-                </a:tc>
-                <a:tc>
-                  <a:txBody>
-                    <a:bodyPr/>
-                    <a:lstStyle/>
-                    <a:p>
-                      <a:r>
-                        <a:rPr lang="en-US" sz="1100" b="0" dirty="0"/>
-                        <a:t>LOW</a:t>
-                      </a:r>
-                    </a:p>
-                  </a:txBody>
-                  <a:tcPr>
-                    <a:solidFill>
-                      <a:srgbClr val="00B0F0"/>
-                    </a:solidFill>
-                  </a:tcPr>
-                </a:tc>
-                <a:tc>
-                  <a:txBody>
-                    <a:bodyPr/>
-                    <a:lstStyle/>
-                    <a:p>
-                      <a:r>
-                        <a:rPr lang="en-US" sz="1100" b="0" dirty="0"/>
-                        <a:t>MEDIUM</a:t>
-                      </a:r>
-                    </a:p>
-                  </a:txBody>
-                  <a:tcPr>
-                    <a:solidFill>
-                      <a:srgbClr val="00B0F0"/>
-                    </a:solidFill>
-                  </a:tcPr>
-                </a:tc>
-                <a:tc>
-                  <a:txBody>
-                    <a:bodyPr/>
-                    <a:lstStyle/>
-                    <a:p>
-                      <a:r>
-                        <a:rPr lang="en-US" sz="1100" b="0" dirty="0"/>
-                        <a:t>HIGH</a:t>
-                      </a:r>
-                    </a:p>
-                  </a:txBody>
-                  <a:tcPr>
-                    <a:solidFill>
-                      <a:srgbClr val="00B0F0"/>
-                    </a:solidFill>
-                  </a:tcPr>
-                </a:tc>
-                <a:extLst>
-                  <a:ext uri="{0D108BD9-81ED-4DB2-BD59-A6C34878D82A}">
-                    <a16:rowId xmlns:a16="http://schemas.microsoft.com/office/drawing/2014/main" val="423997675"/>
-                  </a:ext>
-                </a:extLst>
-              </a:tr>
-              <a:tr h="237327">
-                <a:tc>
-                  <a:txBody>
-                    <a:bodyPr/>
-                    <a:lstStyle/>
-                    <a:p>
-                      <a:r>
-                        <a:rPr lang="en-US" sz="1100" dirty="0">
-                          <a:solidFill>
-                            <a:schemeClr val="bg1"/>
-                          </a:solidFill>
-                        </a:rPr>
-                        <a:t>LOW</a:t>
-                      </a:r>
-                    </a:p>
-                  </a:txBody>
-                  <a:tcPr>
-                    <a:solidFill>
-                      <a:srgbClr val="FF3300"/>
-                    </a:solidFill>
-                  </a:tcPr>
-                </a:tc>
-                <a:tc>
-                  <a:txBody>
-                    <a:bodyPr/>
-                    <a:lstStyle/>
-                    <a:p>
-                      <a:r>
-                        <a:rPr lang="en-US" sz="1100" dirty="0"/>
-                        <a:t>Ignore</a:t>
-                      </a:r>
-                    </a:p>
-                  </a:txBody>
-                  <a:tcPr>
-                    <a:solidFill>
-                      <a:srgbClr val="FFC000"/>
-                    </a:solidFill>
-                  </a:tcPr>
-                </a:tc>
-                <a:tc>
-                  <a:txBody>
-                    <a:bodyPr/>
-                    <a:lstStyle/>
-                    <a:p>
-                      <a:r>
-                        <a:rPr lang="en-US" sz="1100" dirty="0"/>
-                        <a:t>Ignore</a:t>
-                      </a:r>
-                    </a:p>
-                  </a:txBody>
-                  <a:tcPr>
-                    <a:solidFill>
-                      <a:srgbClr val="FFC000"/>
-                    </a:solidFill>
-                  </a:tcPr>
-                </a:tc>
-                <a:tc>
-                  <a:txBody>
-                    <a:bodyPr/>
-                    <a:lstStyle/>
-                    <a:p>
-                      <a:pPr algn="l"/>
-                      <a:r>
-                        <a:rPr lang="en-US" sz="1100" dirty="0"/>
-                        <a:t>Consider</a:t>
-                      </a:r>
-                    </a:p>
-                  </a:txBody>
-                  <a:tcPr/>
-                </a:tc>
-                <a:extLst>
-                  <a:ext uri="{0D108BD9-81ED-4DB2-BD59-A6C34878D82A}">
-                    <a16:rowId xmlns:a16="http://schemas.microsoft.com/office/drawing/2014/main" val="1509479105"/>
-                  </a:ext>
-                </a:extLst>
-              </a:tr>
-              <a:tr h="237327">
-                <a:tc>
-                  <a:txBody>
-                    <a:bodyPr/>
-                    <a:lstStyle/>
-                    <a:p>
-                      <a:r>
-                        <a:rPr lang="en-US" sz="1100" dirty="0">
-                          <a:solidFill>
-                            <a:schemeClr val="bg1"/>
-                          </a:solidFill>
-                        </a:rPr>
-                        <a:t>MEDIUM</a:t>
-                      </a:r>
-                    </a:p>
-                  </a:txBody>
-                  <a:tcPr>
-                    <a:solidFill>
-                      <a:srgbClr val="FF3300"/>
-                    </a:solidFill>
-                  </a:tcPr>
-                </a:tc>
-                <a:tc>
-                  <a:txBody>
-                    <a:bodyPr/>
-                    <a:lstStyle/>
-                    <a:p>
-                      <a:r>
-                        <a:rPr lang="en-US" sz="1100" dirty="0"/>
-                        <a:t>Ignore</a:t>
-                      </a:r>
-                    </a:p>
-                  </a:txBody>
-                  <a:tcPr>
-                    <a:solidFill>
-                      <a:srgbClr val="FFC000"/>
-                    </a:solidFill>
-                  </a:tcPr>
-                </a:tc>
-                <a:tc>
-                  <a:txBody>
-                    <a:bodyPr/>
-                    <a:lstStyle/>
-                    <a:p>
-                      <a:r>
-                        <a:rPr lang="en-US" sz="1100" dirty="0"/>
-                        <a:t>Consider</a:t>
-                      </a:r>
-                    </a:p>
-                  </a:txBody>
-                  <a:tcPr/>
-                </a:tc>
-                <a:tc>
-                  <a:txBody>
-                    <a:bodyPr/>
-                    <a:lstStyle/>
-                    <a:p>
-                      <a:pPr algn="l"/>
-                      <a:r>
-                        <a:rPr lang="en-US" sz="1100" dirty="0"/>
-                        <a:t>Take Action</a:t>
-                      </a:r>
-                    </a:p>
-                  </a:txBody>
-                  <a:tcPr>
-                    <a:solidFill>
-                      <a:schemeClr val="accent6"/>
-                    </a:solidFill>
-                  </a:tcPr>
-                </a:tc>
-                <a:extLst>
-                  <a:ext uri="{0D108BD9-81ED-4DB2-BD59-A6C34878D82A}">
-                    <a16:rowId xmlns:a16="http://schemas.microsoft.com/office/drawing/2014/main" val="497235032"/>
-                  </a:ext>
-                </a:extLst>
-              </a:tr>
-              <a:tr h="339011">
-                <a:tc>
-                  <a:txBody>
-                    <a:bodyPr/>
-                    <a:lstStyle/>
-                    <a:p>
-                      <a:r>
-                        <a:rPr lang="en-US" sz="1100" dirty="0">
-                          <a:solidFill>
-                            <a:schemeClr val="bg1"/>
-                          </a:solidFill>
-                        </a:rPr>
-                        <a:t>HIGH</a:t>
-                      </a:r>
-                    </a:p>
-                  </a:txBody>
-                  <a:tcPr>
-                    <a:solidFill>
-                      <a:srgbClr val="FF3300"/>
-                    </a:solidFill>
-                  </a:tcPr>
-                </a:tc>
-                <a:tc>
-                  <a:txBody>
-                    <a:bodyPr/>
-                    <a:lstStyle/>
-                    <a:p>
-                      <a:r>
-                        <a:rPr lang="en-US" sz="1100" dirty="0"/>
-                        <a:t>Consider</a:t>
-                      </a:r>
-                    </a:p>
-                  </a:txBody>
-                  <a:tcPr/>
-                </a:tc>
-                <a:tc>
-                  <a:txBody>
-                    <a:bodyPr/>
-                    <a:lstStyle/>
-                    <a:p>
-                      <a:r>
-                        <a:rPr lang="en-US" sz="1100" dirty="0"/>
-                        <a:t>Take Action</a:t>
-                      </a:r>
-                    </a:p>
-                  </a:txBody>
-                  <a:tcPr>
-                    <a:solidFill>
-                      <a:schemeClr val="accent6"/>
-                    </a:solidFill>
-                  </a:tcPr>
-                </a:tc>
-                <a:tc>
-                  <a:txBody>
-                    <a:bodyPr/>
-                    <a:lstStyle/>
-                    <a:p>
-                      <a:pPr algn="l"/>
-                      <a:r>
-                        <a:rPr lang="en-US" sz="1100" dirty="0"/>
-                        <a:t>Take Action</a:t>
-                      </a:r>
-                    </a:p>
-                  </a:txBody>
-                  <a:tcPr>
-                    <a:solidFill>
-                      <a:schemeClr val="accent6"/>
-                    </a:solidFill>
-                  </a:tcPr>
-                </a:tc>
-                <a:extLst>
-                  <a:ext uri="{0D108BD9-81ED-4DB2-BD59-A6C34878D82A}">
-                    <a16:rowId xmlns:a16="http://schemas.microsoft.com/office/drawing/2014/main" val="3788833218"/>
-                  </a:ext>
-                </a:extLst>
-              </a:tr>
-            </a:tbl>
-          </a:graphicData>
-        </a:graphic>
-      </p:graphicFrame>
-      <p:sp>
-        <p:nvSpPr>
-          <p:cNvPr id="3" name="TextBox 2">
-            <a:extLst>
-              <a:ext uri="{FF2B5EF4-FFF2-40B4-BE49-F238E27FC236}">
-                <a16:creationId xmlns:a16="http://schemas.microsoft.com/office/drawing/2014/main" id="{7BA6F809-95AA-1146-A37D-F18BD3B00F98}"/>
-              </a:ext>
-            </a:extLst>
-          </p:cNvPr>
-          <p:cNvSpPr txBox="1"/>
-          <p:nvPr/>
-        </p:nvSpPr>
-        <p:spPr>
-          <a:xfrm>
-            <a:off x="245317" y="5144981"/>
-            <a:ext cx="4058817" cy="369332"/>
-          </a:xfrm>
-          <a:prstGeom prst="rect">
-            <a:avLst/>
-          </a:prstGeom>
-          <a:noFill/>
-        </p:spPr>
-        <p:txBody>
-          <a:bodyPr wrap="square" rtlCol="0">
-            <a:spAutoFit/>
-          </a:bodyPr>
-          <a:lstStyle/>
-          <a:p>
-            <a:r>
-              <a:rPr lang="en-US" dirty="0"/>
-              <a:t>Probability</a:t>
-            </a:r>
-          </a:p>
-        </p:txBody>
-      </p:sp>
-      <p:cxnSp>
-        <p:nvCxnSpPr>
-          <p:cNvPr id="5" name="Straight Arrow Connector 4">
-            <a:extLst>
-              <a:ext uri="{FF2B5EF4-FFF2-40B4-BE49-F238E27FC236}">
-                <a16:creationId xmlns:a16="http://schemas.microsoft.com/office/drawing/2014/main" id="{B8B90306-4BC5-D213-BF3C-15655EEAAF4E}"/>
-              </a:ext>
-            </a:extLst>
-          </p:cNvPr>
-          <p:cNvCxnSpPr/>
-          <p:nvPr/>
-        </p:nvCxnSpPr>
-        <p:spPr>
-          <a:xfrm>
-            <a:off x="1406978" y="5406159"/>
-            <a:ext cx="1240971" cy="0"/>
-          </a:xfrm>
-          <a:prstGeom prst="straightConnector1">
-            <a:avLst/>
-          </a:prstGeom>
-          <a:ln>
-            <a:tailEnd type="triangle"/>
-          </a:ln>
-        </p:spPr>
-        <p:style>
-          <a:lnRef idx="1">
-            <a:schemeClr val="dk1"/>
-          </a:lnRef>
-          <a:fillRef idx="0">
-            <a:schemeClr val="dk1"/>
-          </a:fillRef>
-          <a:effectRef idx="0">
-            <a:schemeClr val="dk1"/>
-          </a:effectRef>
-          <a:fontRef idx="minor">
-            <a:schemeClr val="tx1"/>
-          </a:fontRef>
-        </p:style>
-      </p:cxnSp>
-      <p:sp>
-        <p:nvSpPr>
-          <p:cNvPr id="15" name="TextBox 14">
-            <a:extLst>
-              <a:ext uri="{FF2B5EF4-FFF2-40B4-BE49-F238E27FC236}">
-                <a16:creationId xmlns:a16="http://schemas.microsoft.com/office/drawing/2014/main" id="{62BC6C07-D274-8854-9CAA-404E78A349EF}"/>
-              </a:ext>
-            </a:extLst>
-          </p:cNvPr>
-          <p:cNvSpPr txBox="1"/>
-          <p:nvPr/>
-        </p:nvSpPr>
-        <p:spPr>
-          <a:xfrm rot="16200000">
-            <a:off x="-1334587" y="3542601"/>
-            <a:ext cx="2790474" cy="369332"/>
-          </a:xfrm>
-          <a:prstGeom prst="rect">
-            <a:avLst/>
-          </a:prstGeom>
-          <a:noFill/>
-        </p:spPr>
-        <p:txBody>
-          <a:bodyPr wrap="square">
-            <a:spAutoFit/>
-          </a:bodyPr>
-          <a:lstStyle/>
-          <a:p>
-            <a:r>
-              <a:rPr lang="en-US" dirty="0"/>
-              <a:t>Impact</a:t>
-            </a:r>
-          </a:p>
-        </p:txBody>
-      </p:sp>
-      <p:cxnSp>
-        <p:nvCxnSpPr>
-          <p:cNvPr id="16" name="Straight Arrow Connector 15">
-            <a:extLst>
-              <a:ext uri="{FF2B5EF4-FFF2-40B4-BE49-F238E27FC236}">
-                <a16:creationId xmlns:a16="http://schemas.microsoft.com/office/drawing/2014/main" id="{F82619D8-7ED9-84BB-6942-73403A7B2970}"/>
-              </a:ext>
-            </a:extLst>
-          </p:cNvPr>
-          <p:cNvCxnSpPr>
-            <a:cxnSpLocks/>
-          </p:cNvCxnSpPr>
-          <p:nvPr/>
-        </p:nvCxnSpPr>
-        <p:spPr>
-          <a:xfrm flipV="1">
-            <a:off x="60650" y="3174272"/>
-            <a:ext cx="0" cy="1105990"/>
-          </a:xfrm>
-          <a:prstGeom prst="straightConnector1">
-            <a:avLst/>
-          </a:prstGeom>
-          <a:ln>
-            <a:tailEnd type="triangle"/>
-          </a:ln>
-        </p:spPr>
-        <p:style>
-          <a:lnRef idx="1">
-            <a:schemeClr val="dk1"/>
-          </a:lnRef>
-          <a:fillRef idx="0">
-            <a:schemeClr val="dk1"/>
-          </a:fillRef>
-          <a:effectRef idx="0">
-            <a:schemeClr val="dk1"/>
-          </a:effectRef>
-          <a:fontRef idx="minor">
-            <a:schemeClr val="tx1"/>
-          </a:fontRef>
-        </p:style>
-      </p:cxnSp>
-      <p:graphicFrame>
-        <p:nvGraphicFramePr>
-          <p:cNvPr id="20" name="Table 20">
-            <a:extLst>
-              <a:ext uri="{FF2B5EF4-FFF2-40B4-BE49-F238E27FC236}">
-                <a16:creationId xmlns:a16="http://schemas.microsoft.com/office/drawing/2014/main" id="{FD20EDEA-D884-C290-8917-858E7F0661BD}"/>
-              </a:ext>
-            </a:extLst>
-          </p:cNvPr>
-          <p:cNvGraphicFramePr>
-            <a:graphicFrameLocks noGrp="1"/>
-          </p:cNvGraphicFramePr>
-          <p:nvPr>
-            <p:ph idx="1"/>
-            <p:extLst>
-              <p:ext uri="{D42A27DB-BD31-4B8C-83A1-F6EECF244321}">
-                <p14:modId xmlns:p14="http://schemas.microsoft.com/office/powerpoint/2010/main" val="3904277170"/>
-              </p:ext>
-            </p:extLst>
-          </p:nvPr>
-        </p:nvGraphicFramePr>
-        <p:xfrm>
-          <a:off x="335902" y="395308"/>
-          <a:ext cx="11691253" cy="3545397"/>
-        </p:xfrm>
-        <a:graphic>
-          <a:graphicData uri="http://schemas.openxmlformats.org/drawingml/2006/table">
-            <a:tbl>
-              <a:tblPr firstRow="1" bandRow="1">
-                <a:tableStyleId>{5C22544A-7EE6-4342-B048-85BDC9FD1C3A}</a:tableStyleId>
-              </a:tblPr>
-              <a:tblGrid>
-                <a:gridCol w="3135086">
-                  <a:extLst>
-                    <a:ext uri="{9D8B030D-6E8A-4147-A177-3AD203B41FA5}">
-                      <a16:colId xmlns:a16="http://schemas.microsoft.com/office/drawing/2014/main" val="306995991"/>
-                    </a:ext>
-                  </a:extLst>
-                </a:gridCol>
-                <a:gridCol w="1809668">
-                  <a:extLst>
-                    <a:ext uri="{9D8B030D-6E8A-4147-A177-3AD203B41FA5}">
-                      <a16:colId xmlns:a16="http://schemas.microsoft.com/office/drawing/2014/main" val="2006379726"/>
-                    </a:ext>
-                  </a:extLst>
-                </a:gridCol>
-                <a:gridCol w="2248833">
-                  <a:extLst>
-                    <a:ext uri="{9D8B030D-6E8A-4147-A177-3AD203B41FA5}">
-                      <a16:colId xmlns:a16="http://schemas.microsoft.com/office/drawing/2014/main" val="1476300161"/>
-                    </a:ext>
-                  </a:extLst>
-                </a:gridCol>
-                <a:gridCol w="2248833">
-                  <a:extLst>
-                    <a:ext uri="{9D8B030D-6E8A-4147-A177-3AD203B41FA5}">
-                      <a16:colId xmlns:a16="http://schemas.microsoft.com/office/drawing/2014/main" val="4142818946"/>
-                    </a:ext>
-                  </a:extLst>
-                </a:gridCol>
-                <a:gridCol w="2248833">
-                  <a:extLst>
-                    <a:ext uri="{9D8B030D-6E8A-4147-A177-3AD203B41FA5}">
-                      <a16:colId xmlns:a16="http://schemas.microsoft.com/office/drawing/2014/main" val="2785305796"/>
-                    </a:ext>
-                  </a:extLst>
-                </a:gridCol>
-              </a:tblGrid>
-              <a:tr h="393933">
-                <a:tc>
-                  <a:txBody>
-                    <a:bodyPr/>
-                    <a:lstStyle/>
-                    <a:p>
-                      <a:pPr algn="ctr"/>
-                      <a:r>
-                        <a:rPr lang="en-US" dirty="0"/>
-                        <a:t>RISK Analysis</a:t>
-                      </a:r>
-                    </a:p>
-                  </a:txBody>
-                  <a:tcPr/>
-                </a:tc>
-                <a:tc>
-                  <a:txBody>
-                    <a:bodyPr/>
-                    <a:lstStyle/>
-                    <a:p>
-                      <a:pPr algn="ctr"/>
-                      <a:r>
-                        <a:rPr lang="en-US" dirty="0"/>
-                        <a:t>Probability</a:t>
-                      </a:r>
-                    </a:p>
-                  </a:txBody>
-                  <a:tcPr/>
-                </a:tc>
-                <a:tc>
-                  <a:txBody>
-                    <a:bodyPr/>
-                    <a:lstStyle/>
-                    <a:p>
-                      <a:pPr algn="ctr"/>
-                      <a:r>
-                        <a:rPr lang="en-US" dirty="0"/>
-                        <a:t>Impact</a:t>
-                      </a:r>
-                    </a:p>
-                  </a:txBody>
-                  <a:tcPr/>
-                </a:tc>
-                <a:tc>
-                  <a:txBody>
-                    <a:bodyPr/>
-                    <a:lstStyle/>
-                    <a:p>
-                      <a:pPr algn="ctr"/>
-                      <a:r>
-                        <a:rPr lang="en-US" dirty="0"/>
-                        <a:t>RISK Weight</a:t>
-                      </a:r>
-                    </a:p>
-                  </a:txBody>
-                  <a:tcPr/>
-                </a:tc>
-                <a:tc>
-                  <a:txBody>
-                    <a:bodyPr/>
-                    <a:lstStyle/>
-                    <a:p>
-                      <a:pPr algn="ctr"/>
-                      <a:r>
-                        <a:rPr lang="en-US" dirty="0"/>
-                        <a:t>Action Taken</a:t>
-                      </a:r>
-                    </a:p>
-                  </a:txBody>
-                  <a:tcPr/>
-                </a:tc>
-                <a:extLst>
-                  <a:ext uri="{0D108BD9-81ED-4DB2-BD59-A6C34878D82A}">
-                    <a16:rowId xmlns:a16="http://schemas.microsoft.com/office/drawing/2014/main" val="2066679566"/>
-                  </a:ext>
-                </a:extLst>
-              </a:tr>
-              <a:tr h="393933">
-                <a:tc>
-                  <a:txBody>
-                    <a:bodyPr/>
-                    <a:lstStyle/>
-                    <a:p>
-                      <a:r>
-                        <a:rPr lang="en-US" dirty="0">
-                          <a:solidFill>
-                            <a:schemeClr val="bg1"/>
-                          </a:solidFill>
-                        </a:rPr>
-                        <a:t>Data Loss</a:t>
-                      </a:r>
-                    </a:p>
-                  </a:txBody>
-                  <a:tcPr>
-                    <a:solidFill>
-                      <a:schemeClr val="accent2">
-                        <a:lumMod val="75000"/>
-                      </a:schemeClr>
-                    </a:solidFill>
-                  </a:tcPr>
-                </a:tc>
-                <a:tc>
-                  <a:txBody>
-                    <a:bodyPr/>
-                    <a:lstStyle/>
-                    <a:p>
-                      <a:endParaRPr lang="en-US" dirty="0"/>
-                    </a:p>
-                  </a:txBody>
-                  <a:tcPr/>
-                </a:tc>
-                <a:tc>
-                  <a:txBody>
-                    <a:bodyPr/>
-                    <a:lstStyle/>
-                    <a:p>
-                      <a:endParaRPr lang="en-US"/>
-                    </a:p>
-                  </a:txBody>
-                  <a:tcPr/>
-                </a:tc>
-                <a:tc>
-                  <a:txBody>
-                    <a:bodyPr/>
-                    <a:lstStyle/>
-                    <a:p>
-                      <a:endParaRPr lang="en-US"/>
-                    </a:p>
-                  </a:txBody>
-                  <a:tcPr/>
-                </a:tc>
-                <a:tc>
-                  <a:txBody>
-                    <a:bodyPr/>
-                    <a:lstStyle/>
-                    <a:p>
-                      <a:endParaRPr lang="en-US" dirty="0"/>
-                    </a:p>
-                  </a:txBody>
-                  <a:tcPr/>
-                </a:tc>
-                <a:extLst>
-                  <a:ext uri="{0D108BD9-81ED-4DB2-BD59-A6C34878D82A}">
-                    <a16:rowId xmlns:a16="http://schemas.microsoft.com/office/drawing/2014/main" val="3933104338"/>
-                  </a:ext>
-                </a:extLst>
-              </a:tr>
-              <a:tr h="393933">
-                <a:tc>
-                  <a:txBody>
-                    <a:bodyPr/>
-                    <a:lstStyle/>
-                    <a:p>
-                      <a:r>
-                        <a:rPr lang="en-US" dirty="0">
-                          <a:solidFill>
-                            <a:schemeClr val="bg1"/>
-                          </a:solidFill>
-                        </a:rPr>
-                        <a:t>Laptop Malfunctioning/Fails</a:t>
-                      </a:r>
-                    </a:p>
-                  </a:txBody>
-                  <a:tcPr>
-                    <a:solidFill>
-                      <a:schemeClr val="accent2">
-                        <a:lumMod val="75000"/>
-                      </a:schemeClr>
-                    </a:solidFill>
-                  </a:tcPr>
-                </a:tc>
-                <a:tc>
-                  <a:txBody>
-                    <a:bodyPr/>
-                    <a:lstStyle/>
-                    <a:p>
-                      <a:endParaRPr lang="en-US" dirty="0"/>
-                    </a:p>
-                  </a:txBody>
-                  <a:tcPr/>
-                </a:tc>
-                <a:tc>
-                  <a:txBody>
-                    <a:bodyPr/>
-                    <a:lstStyle/>
-                    <a:p>
-                      <a:endParaRPr lang="en-US"/>
-                    </a:p>
-                  </a:txBody>
-                  <a:tcPr/>
-                </a:tc>
-                <a:tc>
-                  <a:txBody>
-                    <a:bodyPr/>
-                    <a:lstStyle/>
-                    <a:p>
-                      <a:endParaRPr lang="en-US"/>
-                    </a:p>
-                  </a:txBody>
-                  <a:tcPr/>
-                </a:tc>
-                <a:tc>
-                  <a:txBody>
-                    <a:bodyPr/>
-                    <a:lstStyle/>
-                    <a:p>
-                      <a:endParaRPr lang="en-US"/>
-                    </a:p>
-                  </a:txBody>
-                  <a:tcPr/>
-                </a:tc>
-                <a:extLst>
-                  <a:ext uri="{0D108BD9-81ED-4DB2-BD59-A6C34878D82A}">
-                    <a16:rowId xmlns:a16="http://schemas.microsoft.com/office/drawing/2014/main" val="2151315953"/>
-                  </a:ext>
-                </a:extLst>
-              </a:tr>
-              <a:tr h="393933">
-                <a:tc>
-                  <a:txBody>
-                    <a:bodyPr/>
-                    <a:lstStyle/>
-                    <a:p>
-                      <a:r>
-                        <a:rPr lang="en-US" dirty="0">
-                          <a:solidFill>
-                            <a:schemeClr val="bg1"/>
-                          </a:solidFill>
-                        </a:rPr>
-                        <a:t>If  Video not get Uploaded </a:t>
-                      </a:r>
-                    </a:p>
-                  </a:txBody>
-                  <a:tcPr>
-                    <a:solidFill>
-                      <a:schemeClr val="accent2">
-                        <a:lumMod val="75000"/>
-                      </a:schemeClr>
-                    </a:solidFill>
-                  </a:tcPr>
-                </a:tc>
-                <a:tc>
-                  <a:txBody>
-                    <a:bodyPr/>
-                    <a:lstStyle/>
-                    <a:p>
-                      <a:endParaRPr lang="en-US" dirty="0"/>
-                    </a:p>
-                  </a:txBody>
-                  <a:tcPr/>
-                </a:tc>
-                <a:tc>
-                  <a:txBody>
-                    <a:bodyPr/>
-                    <a:lstStyle/>
-                    <a:p>
-                      <a:endParaRPr lang="en-US"/>
-                    </a:p>
-                  </a:txBody>
-                  <a:tcPr/>
-                </a:tc>
-                <a:tc>
-                  <a:txBody>
-                    <a:bodyPr/>
-                    <a:lstStyle/>
-                    <a:p>
-                      <a:endParaRPr lang="en-US"/>
-                    </a:p>
-                  </a:txBody>
-                  <a:tcPr/>
-                </a:tc>
-                <a:tc>
-                  <a:txBody>
-                    <a:bodyPr/>
-                    <a:lstStyle/>
-                    <a:p>
-                      <a:endParaRPr lang="en-US"/>
-                    </a:p>
-                  </a:txBody>
-                  <a:tcPr/>
-                </a:tc>
-                <a:extLst>
-                  <a:ext uri="{0D108BD9-81ED-4DB2-BD59-A6C34878D82A}">
-                    <a16:rowId xmlns:a16="http://schemas.microsoft.com/office/drawing/2014/main" val="29131308"/>
-                  </a:ext>
-                </a:extLst>
-              </a:tr>
-              <a:tr h="393933">
-                <a:tc>
-                  <a:txBody>
-                    <a:bodyPr/>
-                    <a:lstStyle/>
-                    <a:p>
-                      <a:endParaRPr lang="en-US" dirty="0"/>
-                    </a:p>
-                  </a:txBody>
-                  <a:tcPr/>
-                </a:tc>
-                <a:tc>
-                  <a:txBody>
-                    <a:bodyPr/>
-                    <a:lstStyle/>
-                    <a:p>
-                      <a:endParaRPr lang="en-US" dirty="0"/>
-                    </a:p>
-                  </a:txBody>
-                  <a:tcPr/>
-                </a:tc>
-                <a:tc>
-                  <a:txBody>
-                    <a:bodyPr/>
-                    <a:lstStyle/>
-                    <a:p>
-                      <a:endParaRPr lang="en-US"/>
-                    </a:p>
-                  </a:txBody>
-                  <a:tcPr/>
-                </a:tc>
-                <a:tc>
-                  <a:txBody>
-                    <a:bodyPr/>
-                    <a:lstStyle/>
-                    <a:p>
-                      <a:endParaRPr lang="en-US"/>
-                    </a:p>
-                  </a:txBody>
-                  <a:tcPr/>
-                </a:tc>
-                <a:tc>
-                  <a:txBody>
-                    <a:bodyPr/>
-                    <a:lstStyle/>
-                    <a:p>
-                      <a:endParaRPr lang="en-US"/>
-                    </a:p>
-                  </a:txBody>
-                  <a:tcPr/>
-                </a:tc>
-                <a:extLst>
-                  <a:ext uri="{0D108BD9-81ED-4DB2-BD59-A6C34878D82A}">
-                    <a16:rowId xmlns:a16="http://schemas.microsoft.com/office/drawing/2014/main" val="2858115616"/>
-                  </a:ext>
-                </a:extLst>
-              </a:tr>
-              <a:tr h="393933">
-                <a:tc>
-                  <a:txBody>
-                    <a:bodyPr/>
-                    <a:lstStyle/>
-                    <a:p>
-                      <a:r>
-                        <a:rPr lang="en-US" dirty="0">
-                          <a:solidFill>
-                            <a:schemeClr val="bg1"/>
-                          </a:solidFill>
-                        </a:rPr>
-                        <a:t>Learning Video Editing</a:t>
-                      </a:r>
-                    </a:p>
-                  </a:txBody>
-                  <a:tcPr>
-                    <a:solidFill>
-                      <a:srgbClr val="009900"/>
-                    </a:solidFill>
-                  </a:tcPr>
-                </a:tc>
-                <a:tc>
-                  <a:txBody>
-                    <a:bodyPr/>
-                    <a:lstStyle/>
-                    <a:p>
-                      <a:endParaRPr lang="en-US" dirty="0"/>
-                    </a:p>
-                  </a:txBody>
-                  <a:tcPr/>
-                </a:tc>
-                <a:tc>
-                  <a:txBody>
-                    <a:bodyPr/>
-                    <a:lstStyle/>
-                    <a:p>
-                      <a:endParaRPr lang="en-US"/>
-                    </a:p>
-                  </a:txBody>
-                  <a:tcPr/>
-                </a:tc>
-                <a:tc>
-                  <a:txBody>
-                    <a:bodyPr/>
-                    <a:lstStyle/>
-                    <a:p>
-                      <a:endParaRPr lang="en-US"/>
-                    </a:p>
-                  </a:txBody>
-                  <a:tcPr/>
-                </a:tc>
-                <a:tc>
-                  <a:txBody>
-                    <a:bodyPr/>
-                    <a:lstStyle/>
-                    <a:p>
-                      <a:endParaRPr lang="en-US"/>
-                    </a:p>
-                  </a:txBody>
-                  <a:tcPr/>
-                </a:tc>
-                <a:extLst>
-                  <a:ext uri="{0D108BD9-81ED-4DB2-BD59-A6C34878D82A}">
-                    <a16:rowId xmlns:a16="http://schemas.microsoft.com/office/drawing/2014/main" val="246254319"/>
-                  </a:ext>
-                </a:extLst>
-              </a:tr>
-              <a:tr h="393933">
-                <a:tc>
-                  <a:txBody>
-                    <a:bodyPr/>
-                    <a:lstStyle/>
-                    <a:p>
-                      <a:r>
-                        <a:rPr lang="en-US" dirty="0">
-                          <a:solidFill>
-                            <a:schemeClr val="bg1"/>
-                          </a:solidFill>
-                        </a:rPr>
-                        <a:t>Confidence Building</a:t>
-                      </a:r>
-                    </a:p>
-                  </a:txBody>
-                  <a:tcPr>
-                    <a:solidFill>
-                      <a:srgbClr val="009900"/>
-                    </a:solidFill>
-                  </a:tcPr>
-                </a:tc>
-                <a:tc>
-                  <a:txBody>
-                    <a:bodyPr/>
-                    <a:lstStyle/>
-                    <a:p>
-                      <a:endParaRPr lang="en-US" dirty="0"/>
-                    </a:p>
-                  </a:txBody>
-                  <a:tcPr/>
-                </a:tc>
-                <a:tc>
-                  <a:txBody>
-                    <a:bodyPr/>
-                    <a:lstStyle/>
-                    <a:p>
-                      <a:endParaRPr lang="en-US"/>
-                    </a:p>
-                  </a:txBody>
-                  <a:tcPr/>
-                </a:tc>
-                <a:tc>
-                  <a:txBody>
-                    <a:bodyPr/>
-                    <a:lstStyle/>
-                    <a:p>
-                      <a:endParaRPr lang="en-US"/>
-                    </a:p>
-                  </a:txBody>
-                  <a:tcPr/>
-                </a:tc>
-                <a:tc>
-                  <a:txBody>
-                    <a:bodyPr/>
-                    <a:lstStyle/>
-                    <a:p>
-                      <a:endParaRPr lang="en-US"/>
-                    </a:p>
-                  </a:txBody>
-                  <a:tcPr/>
-                </a:tc>
-                <a:extLst>
-                  <a:ext uri="{0D108BD9-81ED-4DB2-BD59-A6C34878D82A}">
-                    <a16:rowId xmlns:a16="http://schemas.microsoft.com/office/drawing/2014/main" val="1699099540"/>
-                  </a:ext>
-                </a:extLst>
-              </a:tr>
-              <a:tr h="393933">
-                <a:tc>
-                  <a:txBody>
-                    <a:bodyPr/>
-                    <a:lstStyle/>
-                    <a:p>
-                      <a:r>
-                        <a:rPr lang="en-US" dirty="0">
-                          <a:solidFill>
-                            <a:schemeClr val="bg1"/>
-                          </a:solidFill>
-                        </a:rPr>
-                        <a:t>VC link in personal Website</a:t>
-                      </a:r>
-                    </a:p>
-                  </a:txBody>
-                  <a:tcPr>
-                    <a:solidFill>
-                      <a:srgbClr val="009900"/>
-                    </a:solidFill>
-                  </a:tcPr>
-                </a:tc>
-                <a:tc>
-                  <a:txBody>
-                    <a:bodyPr/>
-                    <a:lstStyle/>
-                    <a:p>
-                      <a:endParaRPr lang="en-US"/>
-                    </a:p>
-                  </a:txBody>
-                  <a:tcPr/>
-                </a:tc>
-                <a:tc>
-                  <a:txBody>
-                    <a:bodyPr/>
-                    <a:lstStyle/>
-                    <a:p>
-                      <a:endParaRPr lang="en-US" dirty="0"/>
-                    </a:p>
-                  </a:txBody>
-                  <a:tcPr/>
-                </a:tc>
-                <a:tc>
-                  <a:txBody>
-                    <a:bodyPr/>
-                    <a:lstStyle/>
-                    <a:p>
-                      <a:endParaRPr lang="en-US" dirty="0"/>
-                    </a:p>
-                  </a:txBody>
-                  <a:tcPr/>
-                </a:tc>
-                <a:tc>
-                  <a:txBody>
-                    <a:bodyPr/>
-                    <a:lstStyle/>
-                    <a:p>
-                      <a:endParaRPr lang="en-US"/>
-                    </a:p>
-                  </a:txBody>
-                  <a:tcPr/>
-                </a:tc>
-                <a:extLst>
-                  <a:ext uri="{0D108BD9-81ED-4DB2-BD59-A6C34878D82A}">
-                    <a16:rowId xmlns:a16="http://schemas.microsoft.com/office/drawing/2014/main" val="1900882598"/>
-                  </a:ext>
-                </a:extLst>
-              </a:tr>
-              <a:tr h="393933">
-                <a:tc>
-                  <a:txBody>
-                    <a:bodyPr/>
-                    <a:lstStyle/>
-                    <a:p>
-                      <a:r>
-                        <a:rPr lang="en-US" dirty="0">
-                          <a:solidFill>
-                            <a:schemeClr val="bg1"/>
-                          </a:solidFill>
-                        </a:rPr>
-                        <a:t>Interview Help</a:t>
-                      </a:r>
-                    </a:p>
-                  </a:txBody>
-                  <a:tcPr>
-                    <a:solidFill>
-                      <a:srgbClr val="009900"/>
-                    </a:solidFill>
-                  </a:tcPr>
-                </a:tc>
-                <a:tc>
-                  <a:txBody>
-                    <a:bodyPr/>
-                    <a:lstStyle/>
-                    <a:p>
-                      <a:endParaRPr lang="en-US"/>
-                    </a:p>
-                  </a:txBody>
-                  <a:tcPr/>
-                </a:tc>
-                <a:tc>
-                  <a:txBody>
-                    <a:bodyPr/>
-                    <a:lstStyle/>
-                    <a:p>
-                      <a:endParaRPr lang="en-US"/>
-                    </a:p>
-                  </a:txBody>
-                  <a:tcPr/>
-                </a:tc>
-                <a:tc>
-                  <a:txBody>
-                    <a:bodyPr/>
-                    <a:lstStyle/>
-                    <a:p>
-                      <a:endParaRPr lang="en-US" dirty="0"/>
-                    </a:p>
-                  </a:txBody>
-                  <a:tcPr/>
-                </a:tc>
-                <a:tc>
-                  <a:txBody>
-                    <a:bodyPr/>
-                    <a:lstStyle/>
-                    <a:p>
-                      <a:endParaRPr lang="en-US" dirty="0"/>
-                    </a:p>
-                  </a:txBody>
-                  <a:tcPr/>
-                </a:tc>
-                <a:extLst>
-                  <a:ext uri="{0D108BD9-81ED-4DB2-BD59-A6C34878D82A}">
-                    <a16:rowId xmlns:a16="http://schemas.microsoft.com/office/drawing/2014/main" val="2565877044"/>
-                  </a:ext>
-                </a:extLst>
-              </a:tr>
-            </a:tbl>
-          </a:graphicData>
-        </a:graphic>
-      </p:graphicFrame>
-    </p:spTree>
-    <p:extLst>
-      <p:ext uri="{BB962C8B-B14F-4D97-AF65-F5344CB8AC3E}">
-        <p14:creationId xmlns:p14="http://schemas.microsoft.com/office/powerpoint/2010/main" val="1280320867"/>
-      </p:ext>
-    </p:extLst>
-  </p:cSld>
-  <p:clrMapOvr>
-    <a:masterClrMapping/>
-  </p:clrMapOvr>
-  <p:transition spd="slow">
-    <p:push dir="u"/>
-  </p:transition>
-</p:sld>
-</file>
-
-<file path=ppt/slides/slide8.xml><?xml version="1.0" encoding="utf-8"?>
-<p:sld xmlns:a="http://schemas.openxmlformats.org/drawingml/2006/main" xmlns:r="http://schemas.openxmlformats.org/officeDocument/2006/relationships" xmlns:p="http://schemas.openxmlformats.org/presentationml/2006/main">
-  <p:cSld>
-    <p:spTree>
-      <p:nvGrpSpPr>
-        <p:cNvPr id="1" name=""/>
-        <p:cNvGrpSpPr/>
-        <p:nvPr/>
-      </p:nvGrpSpPr>
-      <p:grpSpPr>
-        <a:xfrm>
-          <a:off x="0" y="0"/>
-          <a:ext cx="0" cy="0"/>
-          <a:chOff x="0" y="0"/>
-          <a:chExt cx="0" cy="0"/>
-        </a:xfrm>
-      </p:grpSpPr>
-      <p:sp>
-        <p:nvSpPr>
-          <p:cNvPr id="3" name="TextBox 2">
-            <a:extLst>
-              <a:ext uri="{FF2B5EF4-FFF2-40B4-BE49-F238E27FC236}">
-                <a16:creationId xmlns:a16="http://schemas.microsoft.com/office/drawing/2014/main" id="{3338DFEC-C617-1E86-A27A-A77D4AC20EE2}"/>
-              </a:ext>
-            </a:extLst>
-          </p:cNvPr>
-          <p:cNvSpPr txBox="1"/>
-          <p:nvPr/>
-        </p:nvSpPr>
-        <p:spPr>
-          <a:xfrm>
-            <a:off x="223935" y="251927"/>
-            <a:ext cx="11737910" cy="3862596"/>
-          </a:xfrm>
-          <a:prstGeom prst="rect">
-            <a:avLst/>
-          </a:prstGeom>
-          <a:noFill/>
-        </p:spPr>
-        <p:txBody>
-          <a:bodyPr wrap="square" rtlCol="0">
-            <a:spAutoFit/>
-          </a:bodyPr>
-          <a:lstStyle/>
-          <a:p>
-            <a:r>
-              <a:rPr lang="en-US" dirty="0"/>
-              <a:t>							                     </a:t>
-            </a:r>
-            <a:r>
-              <a:rPr lang="en-US" sz="2500" u="sng" dirty="0"/>
-              <a:t>Conclusion</a:t>
-            </a:r>
-          </a:p>
-          <a:p>
-            <a:endParaRPr lang="en-US" sz="2200" u="sng" dirty="0"/>
-          </a:p>
-          <a:p>
-            <a:endParaRPr lang="en-US" sz="2200" dirty="0"/>
-          </a:p>
-          <a:p>
-            <a:pPr marL="342900" indent="-342900">
-              <a:buFont typeface="Arial" panose="020B0604020202020204" pitchFamily="34" charset="0"/>
-              <a:buChar char="•"/>
-            </a:pPr>
-            <a:r>
-              <a:rPr lang="en-US" sz="2200" dirty="0"/>
-              <a:t>Learned about</a:t>
-            </a:r>
-          </a:p>
-          <a:p>
-            <a:pPr marL="800100" lvl="1" indent="-342900">
-              <a:buFont typeface="Arial" panose="020B0604020202020204" pitchFamily="34" charset="0"/>
-              <a:buChar char="•"/>
-            </a:pPr>
-            <a:r>
-              <a:rPr lang="en-US" sz="2200" dirty="0"/>
-              <a:t>GANTT, SWOT</a:t>
-            </a:r>
-          </a:p>
-          <a:p>
-            <a:pPr marL="800100" lvl="1" indent="-342900">
-              <a:buFont typeface="Arial" panose="020B0604020202020204" pitchFamily="34" charset="0"/>
-              <a:buChar char="•"/>
-            </a:pPr>
-            <a:r>
-              <a:rPr lang="en-US" sz="2200" dirty="0"/>
-              <a:t>Tools for Video Editing and Chart making </a:t>
-            </a:r>
-          </a:p>
-          <a:p>
-            <a:pPr marL="342900" indent="-342900">
-              <a:buFont typeface="Arial" panose="020B0604020202020204" pitchFamily="34" charset="0"/>
-              <a:buChar char="•"/>
-            </a:pPr>
-            <a:r>
-              <a:rPr lang="en-US" sz="2200" dirty="0"/>
-              <a:t>Helped to speak Infront of Camera</a:t>
-            </a:r>
-          </a:p>
-          <a:p>
-            <a:pPr marL="342900" indent="-342900">
-              <a:buFont typeface="Arial" panose="020B0604020202020204" pitchFamily="34" charset="0"/>
-              <a:buChar char="•"/>
-            </a:pPr>
-            <a:r>
-              <a:rPr lang="en-US" sz="2200" dirty="0"/>
-              <a:t>Assessment will help for Interviews</a:t>
-            </a:r>
-          </a:p>
-          <a:p>
-            <a:pPr marL="342900" indent="-342900">
-              <a:buFont typeface="Arial" panose="020B0604020202020204" pitchFamily="34" charset="0"/>
-              <a:buChar char="•"/>
-            </a:pPr>
-            <a:endParaRPr lang="en-US" sz="2200" dirty="0"/>
-          </a:p>
-          <a:p>
-            <a:pPr marL="342900" indent="-342900">
-              <a:buFont typeface="Arial" panose="020B0604020202020204" pitchFamily="34" charset="0"/>
-              <a:buChar char="•"/>
-            </a:pPr>
-            <a:endParaRPr lang="en-US" sz="2200" dirty="0"/>
-          </a:p>
-          <a:p>
-            <a:pPr marL="342900" indent="-342900">
-              <a:buFont typeface="Arial" panose="020B0604020202020204" pitchFamily="34" charset="0"/>
-              <a:buChar char="•"/>
-            </a:pPr>
-            <a:endParaRPr lang="en-US" sz="2200" u="sng" dirty="0"/>
-          </a:p>
-        </p:txBody>
-      </p:sp>
-    </p:spTree>
-    <p:extLst>
-      <p:ext uri="{BB962C8B-B14F-4D97-AF65-F5344CB8AC3E}">
-        <p14:creationId xmlns:p14="http://schemas.microsoft.com/office/powerpoint/2010/main" val="3357108174"/>
-      </p:ext>
-    </p:extLst>
-  </p:cSld>
-  <p:clrMapOvr>
-    <a:masterClrMapping/>
-  </p:clrMapOvr>
-  <p:transition spd="slow">
-    <p:push dir="u"/>
-  </p:transition>
-</p:sld>
-</file>
-
-<file path=ppt/slides/slide9.xml><?xml version="1.0" encoding="utf-8"?>
-<p:sld xmlns:a="http://schemas.openxmlformats.org/drawingml/2006/main" xmlns:r="http://schemas.openxmlformats.org/officeDocument/2006/relationships" xmlns:p="http://schemas.openxmlformats.org/presentationml/2006/main">
-  <p:cSld>
-    <p:spTree>
-      <p:nvGrpSpPr>
-        <p:cNvPr id="1" name=""/>
-        <p:cNvGrpSpPr/>
-        <p:nvPr/>
-      </p:nvGrpSpPr>
-      <p:grpSpPr>
-        <a:xfrm>
-          <a:off x="0" y="0"/>
-          <a:ext cx="0" cy="0"/>
-          <a:chOff x="0" y="0"/>
-          <a:chExt cx="0" cy="0"/>
-        </a:xfrm>
-      </p:grpSpPr>
-      <p:sp>
-        <p:nvSpPr>
-          <p:cNvPr id="2" name="TextBox 1">
-            <a:extLst>
-              <a:ext uri="{FF2B5EF4-FFF2-40B4-BE49-F238E27FC236}">
-                <a16:creationId xmlns:a16="http://schemas.microsoft.com/office/drawing/2014/main" id="{E63E5E57-C321-A8EA-7969-A5BE77E95CB3}"/>
-              </a:ext>
-            </a:extLst>
-          </p:cNvPr>
-          <p:cNvSpPr txBox="1"/>
-          <p:nvPr/>
-        </p:nvSpPr>
-        <p:spPr>
-          <a:xfrm>
-            <a:off x="3163077" y="2105561"/>
-            <a:ext cx="6223519" cy="1323439"/>
-          </a:xfrm>
-          <a:prstGeom prst="rect">
-            <a:avLst/>
-          </a:prstGeom>
-          <a:noFill/>
-        </p:spPr>
-        <p:txBody>
-          <a:bodyPr wrap="square" rtlCol="0">
-            <a:spAutoFit/>
-          </a:bodyPr>
-          <a:lstStyle/>
-          <a:p>
-            <a:r>
-              <a:rPr lang="en-US" sz="8000" b="1" dirty="0">
-                <a:solidFill>
-                  <a:srgbClr val="FF0000"/>
-                </a:solidFill>
-              </a:rPr>
-              <a:t>Thank You</a:t>
-            </a:r>
-          </a:p>
-        </p:txBody>
-      </p:sp>
-    </p:spTree>
-    <p:extLst>
-      <p:ext uri="{BB962C8B-B14F-4D97-AF65-F5344CB8AC3E}">
-        <p14:creationId xmlns:p14="http://schemas.microsoft.com/office/powerpoint/2010/main" val="1382152045"/>
       </p:ext>
     </p:extLst>
   </p:cSld>
